--- a/example.pptx
+++ b/example.pptx
@@ -3251,7 +3251,7 @@
                 </a:solidFill>
                 <a:latin typeface="IBM Plex Sans"/>
               </a:rPr>
-              <a:t>Årsrapport 2026.</a:t>
+              <a:t>Årsrapport 2026</a:t>
             </a:r>
           </a:p>
           <a:p>
@@ -3272,9 +3272,44 @@
           </a:p>
         </p:txBody>
       </p:sp>
+      <p:sp>
+        <p:nvSpPr>
+          <p:cNvPr id="5" name="TextBox 4"/>
+          <p:cNvSpPr txBox="1"/>
+          <p:nvPr/>
+        </p:nvSpPr>
+        <p:spPr>
+          <a:xfrm>
+            <a:off x="603504" y="5559552"/>
+            <a:ext cx="7315200" cy="365760"/>
+          </a:xfrm>
+          <a:prstGeom prst="rect">
+            <a:avLst/>
+          </a:prstGeom>
+          <a:noFill/>
+        </p:spPr>
+        <p:txBody>
+          <a:bodyPr wrap="square">
+            <a:spAutoFit/>
+          </a:bodyPr>
+          <a:lstStyle/>
+          <a:p>
+            <a:pPr algn="l"/>
+            <a:r>
+              <a:rPr sz="1300" b="1" spc="120">
+                <a:solidFill>
+                  <a:srgbClr val="6B6B6B"/>
+                </a:solidFill>
+                <a:latin typeface="IBM Plex Mono"/>
+              </a:rPr>
+              <a:t>ØKONOMISTYRELSEN · LEDELSESOVERBLIK · AUGUST 2026</a:t>
+            </a:r>
+          </a:p>
+        </p:txBody>
+      </p:sp>
       <p:pic>
         <p:nvPicPr>
-          <p:cNvPr id="5" name="Picture 4" descr="oes-logo-green.png"/>
+          <p:cNvPr id="6" name="Picture 5" descr="oes-logo-green.png"/>
           <p:cNvPicPr>
             <a:picLocks noChangeAspect="1"/>
           </p:cNvPicPr>

--- a/example.pptx
+++ b/example.pptx
@@ -5197,9 +5197,44 @@
           </a:p>
         </p:txBody>
       </p:sp>
+      <p:sp>
+        <p:nvSpPr>
+          <p:cNvPr id="6" name="TextBox 5"/>
+          <p:cNvSpPr txBox="1"/>
+          <p:nvPr/>
+        </p:nvSpPr>
+        <p:spPr>
+          <a:xfrm>
+            <a:off x="603504" y="6263640"/>
+            <a:ext cx="9144000" cy="320040"/>
+          </a:xfrm>
+          <a:prstGeom prst="rect">
+            <a:avLst/>
+          </a:prstGeom>
+          <a:noFill/>
+        </p:spPr>
+        <p:txBody>
+          <a:bodyPr wrap="square">
+            <a:spAutoFit/>
+          </a:bodyPr>
+          <a:lstStyle/>
+          <a:p>
+            <a:pPr algn="l"/>
+            <a:r>
+              <a:rPr sz="1300" b="1" spc="120">
+                <a:solidFill>
+                  <a:srgbClr val="6B6B6B"/>
+                </a:solidFill>
+                <a:latin typeface="IBM Plex Mono"/>
+              </a:rPr>
+              <a:t>KILDE: STATENS REGNSKAB, 2026</a:t>
+            </a:r>
+          </a:p>
+        </p:txBody>
+      </p:sp>
       <p:pic>
         <p:nvPicPr>
-          <p:cNvPr id="6" name="Picture 5" descr="oes-logo-green.png"/>
+          <p:cNvPr id="7" name="Picture 6" descr="oes-logo-green.png"/>
           <p:cNvPicPr>
             <a:picLocks noChangeAspect="1"/>
           </p:cNvPicPr>
@@ -5890,9 +5925,44 @@
           </a:p>
         </p:txBody>
       </p:sp>
+      <p:sp>
+        <p:nvSpPr>
+          <p:cNvPr id="18" name="TextBox 17"/>
+          <p:cNvSpPr txBox="1"/>
+          <p:nvPr/>
+        </p:nvSpPr>
+        <p:spPr>
+          <a:xfrm>
+            <a:off x="603504" y="6263640"/>
+            <a:ext cx="9144000" cy="320040"/>
+          </a:xfrm>
+          <a:prstGeom prst="rect">
+            <a:avLst/>
+          </a:prstGeom>
+          <a:noFill/>
+        </p:spPr>
+        <p:txBody>
+          <a:bodyPr wrap="square">
+            <a:spAutoFit/>
+          </a:bodyPr>
+          <a:lstStyle/>
+          <a:p>
+            <a:pPr algn="l"/>
+            <a:r>
+              <a:rPr sz="1300" b="1" spc="120">
+                <a:solidFill>
+                  <a:srgbClr val="6B6B6B"/>
+                </a:solidFill>
+                <a:latin typeface="IBM Plex Mono"/>
+              </a:rPr>
+              <a:t>KILDE: STATENS REGNSKAB, 2026</a:t>
+            </a:r>
+          </a:p>
+        </p:txBody>
+      </p:sp>
       <p:pic>
         <p:nvPicPr>
-          <p:cNvPr id="18" name="Picture 17" descr="oes-logo-green.png"/>
+          <p:cNvPr id="19" name="Picture 18" descr="oes-logo-green.png"/>
           <p:cNvPicPr>
             <a:picLocks noChangeAspect="1"/>
           </p:cNvPicPr>
@@ -8441,9 +8511,44 @@
           </a:p>
         </p:txBody>
       </p:sp>
+      <p:sp>
+        <p:nvSpPr>
+          <p:cNvPr id="15" name="TextBox 14"/>
+          <p:cNvSpPr txBox="1"/>
+          <p:nvPr/>
+        </p:nvSpPr>
+        <p:spPr>
+          <a:xfrm>
+            <a:off x="603504" y="6263640"/>
+            <a:ext cx="9144000" cy="320040"/>
+          </a:xfrm>
+          <a:prstGeom prst="rect">
+            <a:avLst/>
+          </a:prstGeom>
+          <a:noFill/>
+        </p:spPr>
+        <p:txBody>
+          <a:bodyPr wrap="square">
+            <a:spAutoFit/>
+          </a:bodyPr>
+          <a:lstStyle/>
+          <a:p>
+            <a:pPr algn="l"/>
+            <a:r>
+              <a:rPr sz="1300" b="1" spc="120">
+                <a:solidFill>
+                  <a:srgbClr val="6B6B6B"/>
+                </a:solidFill>
+                <a:latin typeface="IBM Plex Mono"/>
+              </a:rPr>
+              <a:t>KILDE: STATENS REGNSKAB, 2026</a:t>
+            </a:r>
+          </a:p>
+        </p:txBody>
+      </p:sp>
       <p:pic>
         <p:nvPicPr>
-          <p:cNvPr id="15" name="Picture 14" descr="oes-logo-green.png"/>
+          <p:cNvPr id="16" name="Picture 15" descr="oes-logo-green.png"/>
           <p:cNvPicPr>
             <a:picLocks noChangeAspect="1"/>
           </p:cNvPicPr>
@@ -9058,9 +9163,44 @@
           </a:graphicData>
         </a:graphic>
       </p:graphicFrame>
+      <p:sp>
+        <p:nvSpPr>
+          <p:cNvPr id="7" name="TextBox 6"/>
+          <p:cNvSpPr txBox="1"/>
+          <p:nvPr/>
+        </p:nvSpPr>
+        <p:spPr>
+          <a:xfrm>
+            <a:off x="603504" y="6263640"/>
+            <a:ext cx="9144000" cy="320040"/>
+          </a:xfrm>
+          <a:prstGeom prst="rect">
+            <a:avLst/>
+          </a:prstGeom>
+          <a:noFill/>
+        </p:spPr>
+        <p:txBody>
+          <a:bodyPr wrap="square">
+            <a:spAutoFit/>
+          </a:bodyPr>
+          <a:lstStyle/>
+          <a:p>
+            <a:pPr algn="l"/>
+            <a:r>
+              <a:rPr sz="1300" b="1" spc="120">
+                <a:solidFill>
+                  <a:srgbClr val="6B6B6B"/>
+                </a:solidFill>
+                <a:latin typeface="IBM Plex Mono"/>
+              </a:rPr>
+              <a:t>KILDE: STATENS REGNSKAB, 2026</a:t>
+            </a:r>
+          </a:p>
+        </p:txBody>
+      </p:sp>
       <p:pic>
         <p:nvPicPr>
-          <p:cNvPr id="7" name="Picture 6" descr="oes-logo-green.png"/>
+          <p:cNvPr id="8" name="Picture 7" descr="oes-logo-green.png"/>
           <p:cNvPicPr>
             <a:picLocks noChangeAspect="1"/>
           </p:cNvPicPr>

--- a/example.pptx
+++ b/example.pptx
@@ -23,6 +23,18 @@
   </p:sldIdLst>
   <p:sldSz cx="12191695" cy="6858000" type="screen4x3"/>
   <p:notesSz cx="6858000" cy="9144000"/>
+  <p:embeddedFontLst>
+    <p:embeddedFont>
+      <p:font typeface="IBM Plex Sans" pitchFamily="34" charset="0" panose="020B0503050203000203"/>
+      <p:regular r:id="rId22"/>
+      <p:bold r:id="rId23"/>
+    </p:embeddedFont>
+    <p:embeddedFont>
+      <p:font typeface="IBM Plex Mono" pitchFamily="49" charset="0" panose="020B0509050203000203"/>
+      <p:regular r:id="rId24"/>
+      <p:bold r:id="rId25"/>
+    </p:embeddedFont>
+  </p:embeddedFontLst>
   <p:defaultTextStyle>
     <a:defPPr>
       <a:defRPr lang="en-US"/>
@@ -5127,7 +5139,7 @@
         </p:nvSpPr>
         <p:spPr>
           <a:xfrm>
-            <a:off x="603504" y="1920240"/>
+            <a:off x="603504" y="1554480"/>
             <a:ext cx="10984687" cy="2560320"/>
           </a:xfrm>
           <a:prstGeom prst="rect">
@@ -5166,7 +5178,7 @@
         </p:nvSpPr>
         <p:spPr>
           <a:xfrm>
-            <a:off x="603504" y="4754880"/>
+            <a:off x="603504" y="4389120"/>
             <a:ext cx="8229600" cy="914400"/>
           </a:xfrm>
           <a:prstGeom prst="rect">

--- a/example.pptx
+++ b/example.pptx
@@ -20,19 +20,23 @@
     <p:sldId id="268" r:id="rId19"/>
     <p:sldId id="269" r:id="rId20"/>
     <p:sldId id="270" r:id="rId21"/>
+    <p:sldId id="271" r:id="rId22"/>
+    <p:sldId id="272" r:id="rId23"/>
+    <p:sldId id="273" r:id="rId24"/>
+    <p:sldId id="274" r:id="rId25"/>
   </p:sldIdLst>
   <p:sldSz cx="12191695" cy="6858000" type="screen4x3"/>
   <p:notesSz cx="6858000" cy="9144000"/>
   <p:embeddedFontLst>
     <p:embeddedFont>
       <p:font typeface="IBM Plex Sans" pitchFamily="34" charset="0" panose="020B0503050203000203"/>
-      <p:regular r:id="rId22"/>
-      <p:bold r:id="rId23"/>
+      <p:regular r:id="rId26"/>
+      <p:bold r:id="rId27"/>
     </p:embeddedFont>
     <p:embeddedFont>
       <p:font typeface="IBM Plex Mono" pitchFamily="49" charset="0" panose="020B0509050203000203"/>
-      <p:regular r:id="rId24"/>
-      <p:bold r:id="rId25"/>
+      <p:regular r:id="rId28"/>
+      <p:bold r:id="rId29"/>
     </p:embeddedFont>
   </p:embeddedFontLst>
   <p:defaultTextStyle>
@@ -3451,114 +3455,27 @@
       </p:sp>
       <p:sp>
         <p:nvSpPr>
-          <p:cNvPr id="4" name="TextBox 3"/>
-          <p:cNvSpPr txBox="1"/>
-          <p:nvPr/>
-        </p:nvSpPr>
-        <p:spPr>
-          <a:xfrm>
-            <a:off x="603504" y="457200"/>
-            <a:ext cx="10984687" cy="731520"/>
-          </a:xfrm>
-          <a:prstGeom prst="rect">
-            <a:avLst/>
-          </a:prstGeom>
-          <a:noFill/>
-        </p:spPr>
-        <p:txBody>
-          <a:bodyPr wrap="square">
-            <a:spAutoFit/>
-          </a:bodyPr>
-          <a:lstStyle/>
-          <a:p>
-            <a:pPr algn="l">
-              <a:lnSpc>
-                <a:spcPct val="105000"/>
-              </a:lnSpc>
-            </a:pPr>
-            <a:r>
-              <a:rPr sz="4200" b="1">
-                <a:solidFill>
-                  <a:srgbClr val="000000"/>
-                </a:solidFill>
-                <a:latin typeface="IBM Plex Sans"/>
-              </a:rPr>
-              <a:t>Tre indsatsområder</a:t>
-            </a:r>
-          </a:p>
-        </p:txBody>
-      </p:sp>
-      <p:sp>
-        <p:nvSpPr>
-          <p:cNvPr id="5" name="Rectangle 4"/>
+          <p:cNvPr id="4" name="Rectangle 3"/>
           <p:cNvSpPr/>
           <p:nvPr/>
         </p:nvSpPr>
         <p:spPr>
           <a:xfrm>
-            <a:off x="694944" y="1044244"/>
-            <a:ext cx="640080" cy="76200"/>
+            <a:off x="0" y="0"/>
+            <a:ext cx="12191695" cy="6858000"/>
           </a:xfrm>
           <a:prstGeom prst="rect">
             <a:avLst/>
           </a:prstGeom>
           <a:solidFill>
-            <a:srgbClr val="066B43"/>
-          </a:solidFill>
-          <a:ln>
-            <a:noFill/>
-          </a:ln>
-          <a:effectLst/>
-        </p:spPr>
-        <p:style>
-          <a:lnRef idx="1">
-            <a:schemeClr val="accent1"/>
-          </a:lnRef>
-          <a:fillRef idx="3">
-            <a:schemeClr val="accent1"/>
-          </a:fillRef>
-          <a:effectRef idx="2">
-            <a:schemeClr val="accent1"/>
-          </a:effectRef>
-          <a:fontRef idx="minor">
-            <a:schemeClr val="lt1"/>
-          </a:fontRef>
-        </p:style>
-        <p:txBody>
-          <a:bodyPr rtlCol="0" anchor="ctr"/>
-          <a:lstStyle/>
-          <a:p>
-            <a:pPr algn="ctr"/>
-          </a:p>
-        </p:txBody>
-      </p:sp>
-      <p:sp>
-        <p:nvSpPr>
-          <p:cNvPr id="6" name="Rectangle 5"/>
-          <p:cNvSpPr/>
-          <p:nvPr/>
-        </p:nvSpPr>
-        <p:spPr>
-          <a:xfrm>
-            <a:off x="603504" y="2148840"/>
-            <a:ext cx="3448202" cy="3291840"/>
-          </a:xfrm>
-          <a:prstGeom prst="rect">
-            <a:avLst/>
-          </a:prstGeom>
-          <a:solidFill>
-            <a:srgbClr val="FFFFFF"/>
+            <a:srgbClr val="E8E8E3"/>
           </a:solidFill>
           <a:ln w="25400">
             <a:solidFill>
               <a:srgbClr val="000000"/>
             </a:solidFill>
           </a:ln>
-          <a:effectLst>
-            <a:outerShdw blurRad="0" dist="38100" dir="2700000" rotWithShape="0">
-              <a:srgbClr val="000000"/>
-            </a:outerShdw>
-          </a:effectLst>
+          <a:effectLst/>
         </p:spPr>
         <p:style>
           <a:lnRef idx="1">
@@ -3575,23 +3492,32 @@
           </a:fontRef>
         </p:style>
         <p:txBody>
-          <a:bodyPr rtlCol="0" anchor="ctr"/>
+          <a:bodyPr rtlCol="0" anchor="ctr" wrap="square"/>
           <a:lstStyle/>
           <a:p>
             <a:pPr algn="ctr"/>
-          </a:p>
-        </p:txBody>
-      </p:sp>
-      <p:sp>
-        <p:nvSpPr>
-          <p:cNvPr id="7" name="Rectangle 6"/>
+            <a:r>
+              <a:rPr sz="1200" b="1" spc="120">
+                <a:solidFill>
+                  <a:srgbClr val="6B6B6B"/>
+                </a:solidFill>
+                <a:latin typeface="IBM Plex Mono"/>
+              </a:rPr>
+              <a:t>FULL-BLEED BILLEDE</a:t>
+            </a:r>
+          </a:p>
+        </p:txBody>
+      </p:sp>
+      <p:sp>
+        <p:nvSpPr>
+          <p:cNvPr id="5" name="Rectangle 4"/>
           <p:cNvSpPr/>
           <p:nvPr/>
         </p:nvSpPr>
         <p:spPr>
           <a:xfrm>
-            <a:off x="877824" y="2423160"/>
-            <a:ext cx="457200" cy="457200"/>
+            <a:off x="0" y="5669280"/>
+            <a:ext cx="8229600" cy="640080"/>
           </a:xfrm>
           <a:prstGeom prst="rect">
             <a:avLst/>
@@ -3628,14 +3554,14 @@
       </p:sp>
       <p:sp>
         <p:nvSpPr>
-          <p:cNvPr id="8" name="TextBox 7"/>
+          <p:cNvPr id="6" name="TextBox 5"/>
           <p:cNvSpPr txBox="1"/>
           <p:nvPr/>
         </p:nvSpPr>
         <p:spPr>
           <a:xfrm>
-            <a:off x="877824" y="3063240"/>
-            <a:ext cx="2899562" cy="548640"/>
+            <a:off x="274320" y="5779008"/>
+            <a:ext cx="7772400" cy="457200"/>
           </a:xfrm>
           <a:prstGeom prst="rect">
             <a:avLst/>
@@ -3648,418 +3574,27 @@
           </a:bodyPr>
           <a:lstStyle/>
           <a:p>
-            <a:pPr algn="l"/>
-            <a:r>
-              <a:rPr sz="2200" b="1">
+            <a:r>
+              <a:rPr sz="1200" b="1" spc="100">
                 <a:solidFill>
-                  <a:srgbClr val="000000"/>
+                  <a:srgbClr val="ED5E66"/>
+                </a:solidFill>
+                <a:latin typeface="IBM Plex Mono"/>
+              </a:rPr>
+              <a:t>FOTO   </a:t>
+            </a:r>
+            <a:r>
+              <a:rPr sz="1800">
+                <a:solidFill>
+                  <a:srgbClr val="FFFFFF"/>
                 </a:solidFill>
                 <a:latin typeface="IBM Plex Sans"/>
               </a:rPr>
-              <a:t>Effektivitet</a:t>
-            </a:r>
-          </a:p>
-        </p:txBody>
-      </p:sp>
-      <p:sp>
-        <p:nvSpPr>
-          <p:cNvPr id="9" name="TextBox 8"/>
-          <p:cNvSpPr txBox="1"/>
-          <p:nvPr/>
-        </p:nvSpPr>
-        <p:spPr>
-          <a:xfrm>
-            <a:off x="877824" y="3611880"/>
-            <a:ext cx="2899562" cy="1645920"/>
-          </a:xfrm>
-          <a:prstGeom prst="rect">
-            <a:avLst/>
-          </a:prstGeom>
-          <a:noFill/>
-        </p:spPr>
-        <p:txBody>
-          <a:bodyPr wrap="square">
-            <a:spAutoFit/>
-          </a:bodyPr>
-          <a:lstStyle/>
-          <a:p>
-            <a:pPr algn="l">
-              <a:lnSpc>
-                <a:spcPct val="130000"/>
-              </a:lnSpc>
-            </a:pPr>
-            <a:r>
-              <a:rPr sz="1600" b="0">
-                <a:solidFill>
-                  <a:srgbClr val="333333"/>
-                </a:solidFill>
-                <a:latin typeface="IBM Plex Sans"/>
-              </a:rPr>
-              <a:t>Færre manuelle trin gennem automatisering.</a:t>
-            </a:r>
-          </a:p>
-        </p:txBody>
-      </p:sp>
-      <p:sp>
-        <p:nvSpPr>
-          <p:cNvPr id="10" name="Rectangle 9"/>
-          <p:cNvSpPr/>
-          <p:nvPr/>
-        </p:nvSpPr>
-        <p:spPr>
-          <a:xfrm>
-            <a:off x="4371746" y="2148840"/>
-            <a:ext cx="3448202" cy="3291840"/>
-          </a:xfrm>
-          <a:prstGeom prst="rect">
-            <a:avLst/>
-          </a:prstGeom>
-          <a:solidFill>
-            <a:srgbClr val="FEF3C7"/>
-          </a:solidFill>
-          <a:ln w="25400">
-            <a:solidFill>
-              <a:srgbClr val="000000"/>
-            </a:solidFill>
-          </a:ln>
-          <a:effectLst>
-            <a:outerShdw blurRad="0" dist="38100" dir="2700000" rotWithShape="0">
-              <a:srgbClr val="000000"/>
-            </a:outerShdw>
-          </a:effectLst>
-        </p:spPr>
-        <p:style>
-          <a:lnRef idx="1">
-            <a:schemeClr val="accent1"/>
-          </a:lnRef>
-          <a:fillRef idx="3">
-            <a:schemeClr val="accent1"/>
-          </a:fillRef>
-          <a:effectRef idx="2">
-            <a:schemeClr val="accent1"/>
-          </a:effectRef>
-          <a:fontRef idx="minor">
-            <a:schemeClr val="lt1"/>
-          </a:fontRef>
-        </p:style>
-        <p:txBody>
-          <a:bodyPr rtlCol="0" anchor="ctr"/>
-          <a:lstStyle/>
-          <a:p>
-            <a:pPr algn="ctr"/>
-          </a:p>
-        </p:txBody>
-      </p:sp>
-      <p:sp>
-        <p:nvSpPr>
-          <p:cNvPr id="11" name="Rectangle 10"/>
-          <p:cNvSpPr/>
-          <p:nvPr/>
-        </p:nvSpPr>
-        <p:spPr>
-          <a:xfrm>
-            <a:off x="4646066" y="2423160"/>
-            <a:ext cx="457200" cy="457200"/>
-          </a:xfrm>
-          <a:prstGeom prst="rect">
-            <a:avLst/>
-          </a:prstGeom>
-          <a:solidFill>
-            <a:srgbClr val="ED5E66"/>
-          </a:solidFill>
-          <a:ln>
-            <a:noFill/>
-          </a:ln>
-          <a:effectLst/>
-        </p:spPr>
-        <p:style>
-          <a:lnRef idx="1">
-            <a:schemeClr val="accent1"/>
-          </a:lnRef>
-          <a:fillRef idx="3">
-            <a:schemeClr val="accent1"/>
-          </a:fillRef>
-          <a:effectRef idx="2">
-            <a:schemeClr val="accent1"/>
-          </a:effectRef>
-          <a:fontRef idx="minor">
-            <a:schemeClr val="lt1"/>
-          </a:fontRef>
-        </p:style>
-        <p:txBody>
-          <a:bodyPr rtlCol="0" anchor="ctr"/>
-          <a:lstStyle/>
-          <a:p>
-            <a:pPr algn="ctr"/>
-          </a:p>
-        </p:txBody>
-      </p:sp>
-      <p:sp>
-        <p:nvSpPr>
-          <p:cNvPr id="12" name="TextBox 11"/>
-          <p:cNvSpPr txBox="1"/>
-          <p:nvPr/>
-        </p:nvSpPr>
-        <p:spPr>
-          <a:xfrm>
-            <a:off x="4646066" y="3063240"/>
-            <a:ext cx="2899562" cy="548640"/>
-          </a:xfrm>
-          <a:prstGeom prst="rect">
-            <a:avLst/>
-          </a:prstGeom>
-          <a:noFill/>
-        </p:spPr>
-        <p:txBody>
-          <a:bodyPr wrap="square">
-            <a:spAutoFit/>
-          </a:bodyPr>
-          <a:lstStyle/>
-          <a:p>
-            <a:pPr algn="l"/>
-            <a:r>
-              <a:rPr sz="2200" b="1">
-                <a:solidFill>
-                  <a:srgbClr val="000000"/>
-                </a:solidFill>
-                <a:latin typeface="IBM Plex Sans"/>
-              </a:rPr>
-              <a:t>Gennemsigtighed</a:t>
-            </a:r>
-          </a:p>
-        </p:txBody>
-      </p:sp>
-      <p:sp>
-        <p:nvSpPr>
-          <p:cNvPr id="13" name="TextBox 12"/>
-          <p:cNvSpPr txBox="1"/>
-          <p:nvPr/>
-        </p:nvSpPr>
-        <p:spPr>
-          <a:xfrm>
-            <a:off x="4646066" y="3611880"/>
-            <a:ext cx="2899562" cy="1645920"/>
-          </a:xfrm>
-          <a:prstGeom prst="rect">
-            <a:avLst/>
-          </a:prstGeom>
-          <a:noFill/>
-        </p:spPr>
-        <p:txBody>
-          <a:bodyPr wrap="square">
-            <a:spAutoFit/>
-          </a:bodyPr>
-          <a:lstStyle/>
-          <a:p>
-            <a:pPr algn="l">
-              <a:lnSpc>
-                <a:spcPct val="130000"/>
-              </a:lnSpc>
-            </a:pPr>
-            <a:r>
-              <a:rPr sz="1600" b="0">
-                <a:solidFill>
-                  <a:srgbClr val="333333"/>
-                </a:solidFill>
-                <a:latin typeface="IBM Plex Sans"/>
-              </a:rPr>
-              <a:t>Det fremhævede kort — gul flade, kun ét per slide.</a:t>
-            </a:r>
-          </a:p>
-        </p:txBody>
-      </p:sp>
-      <p:sp>
-        <p:nvSpPr>
-          <p:cNvPr id="14" name="Rectangle 13"/>
-          <p:cNvSpPr/>
-          <p:nvPr/>
-        </p:nvSpPr>
-        <p:spPr>
-          <a:xfrm>
-            <a:off x="8139988" y="2148840"/>
-            <a:ext cx="3448202" cy="3291840"/>
-          </a:xfrm>
-          <a:prstGeom prst="rect">
-            <a:avLst/>
-          </a:prstGeom>
-          <a:solidFill>
-            <a:srgbClr val="FFFFFF"/>
-          </a:solidFill>
-          <a:ln w="25400">
-            <a:solidFill>
-              <a:srgbClr val="000000"/>
-            </a:solidFill>
-          </a:ln>
-          <a:effectLst>
-            <a:outerShdw blurRad="0" dist="38100" dir="2700000" rotWithShape="0">
-              <a:srgbClr val="000000"/>
-            </a:outerShdw>
-          </a:effectLst>
-        </p:spPr>
-        <p:style>
-          <a:lnRef idx="1">
-            <a:schemeClr val="accent1"/>
-          </a:lnRef>
-          <a:fillRef idx="3">
-            <a:schemeClr val="accent1"/>
-          </a:fillRef>
-          <a:effectRef idx="2">
-            <a:schemeClr val="accent1"/>
-          </a:effectRef>
-          <a:fontRef idx="minor">
-            <a:schemeClr val="lt1"/>
-          </a:fontRef>
-        </p:style>
-        <p:txBody>
-          <a:bodyPr rtlCol="0" anchor="ctr"/>
-          <a:lstStyle/>
-          <a:p>
-            <a:pPr algn="ctr"/>
-          </a:p>
-        </p:txBody>
-      </p:sp>
-      <p:sp>
-        <p:nvSpPr>
-          <p:cNvPr id="15" name="Rectangle 14"/>
-          <p:cNvSpPr/>
-          <p:nvPr/>
-        </p:nvSpPr>
-        <p:spPr>
-          <a:xfrm>
-            <a:off x="8414308" y="2423160"/>
-            <a:ext cx="457200" cy="457200"/>
-          </a:xfrm>
-          <a:prstGeom prst="rect">
-            <a:avLst/>
-          </a:prstGeom>
-          <a:solidFill>
-            <a:srgbClr val="000000"/>
-          </a:solidFill>
-          <a:ln>
-            <a:noFill/>
-          </a:ln>
-          <a:effectLst/>
-        </p:spPr>
-        <p:style>
-          <a:lnRef idx="1">
-            <a:schemeClr val="accent1"/>
-          </a:lnRef>
-          <a:fillRef idx="3">
-            <a:schemeClr val="accent1"/>
-          </a:fillRef>
-          <a:effectRef idx="2">
-            <a:schemeClr val="accent1"/>
-          </a:effectRef>
-          <a:fontRef idx="minor">
-            <a:schemeClr val="lt1"/>
-          </a:fontRef>
-        </p:style>
-        <p:txBody>
-          <a:bodyPr rtlCol="0" anchor="ctr"/>
-          <a:lstStyle/>
-          <a:p>
-            <a:pPr algn="ctr"/>
-          </a:p>
-        </p:txBody>
-      </p:sp>
-      <p:sp>
-        <p:nvSpPr>
-          <p:cNvPr id="16" name="TextBox 15"/>
-          <p:cNvSpPr txBox="1"/>
-          <p:nvPr/>
-        </p:nvSpPr>
-        <p:spPr>
-          <a:xfrm>
-            <a:off x="8414308" y="3063240"/>
-            <a:ext cx="2899562" cy="548640"/>
-          </a:xfrm>
-          <a:prstGeom prst="rect">
-            <a:avLst/>
-          </a:prstGeom>
-          <a:noFill/>
-        </p:spPr>
-        <p:txBody>
-          <a:bodyPr wrap="square">
-            <a:spAutoFit/>
-          </a:bodyPr>
-          <a:lstStyle/>
-          <a:p>
-            <a:pPr algn="l"/>
-            <a:r>
-              <a:rPr sz="2200" b="1">
-                <a:solidFill>
-                  <a:srgbClr val="000000"/>
-                </a:solidFill>
-                <a:latin typeface="IBM Plex Sans"/>
-              </a:rPr>
-              <a:t>Datagrundlag</a:t>
-            </a:r>
-          </a:p>
-        </p:txBody>
-      </p:sp>
-      <p:sp>
-        <p:nvSpPr>
-          <p:cNvPr id="17" name="TextBox 16"/>
-          <p:cNvSpPr txBox="1"/>
-          <p:nvPr/>
-        </p:nvSpPr>
-        <p:spPr>
-          <a:xfrm>
-            <a:off x="8414308" y="3611880"/>
-            <a:ext cx="2899562" cy="1645920"/>
-          </a:xfrm>
-          <a:prstGeom prst="rect">
-            <a:avLst/>
-          </a:prstGeom>
-          <a:noFill/>
-        </p:spPr>
-        <p:txBody>
-          <a:bodyPr wrap="square">
-            <a:spAutoFit/>
-          </a:bodyPr>
-          <a:lstStyle/>
-          <a:p>
-            <a:pPr algn="l">
-              <a:lnSpc>
-                <a:spcPct val="130000"/>
-              </a:lnSpc>
-            </a:pPr>
-            <a:r>
-              <a:rPr sz="1600" b="0">
-                <a:solidFill>
-                  <a:srgbClr val="333333"/>
-                </a:solidFill>
-                <a:latin typeface="IBM Plex Sans"/>
-              </a:rPr>
-              <a:t>Bedre tal til politiske beslutninger.</a:t>
-            </a:r>
-          </a:p>
-        </p:txBody>
-      </p:sp>
-      <p:pic>
-        <p:nvPicPr>
-          <p:cNvPr id="18" name="Picture 17" descr="oes-logo-green.png"/>
-          <p:cNvPicPr>
-            <a:picLocks noChangeAspect="1"/>
-          </p:cNvPicPr>
-          <p:nvPr/>
-        </p:nvPicPr>
-        <p:blipFill>
-          <a:blip r:embed="rId2"/>
-          <a:stretch>
-            <a:fillRect/>
-          </a:stretch>
-        </p:blipFill>
-        <p:spPr>
-          <a:xfrm>
-            <a:off x="10518343" y="6215427"/>
-            <a:ext cx="1417320" cy="386541"/>
-          </a:xfrm>
-          <a:prstGeom prst="rect">
-            <a:avLst/>
-          </a:prstGeom>
-        </p:spPr>
-      </p:pic>
+              <a:t>Full-bleed billede med caption i sort stribe.</a:t>
+            </a:r>
+          </a:p>
+        </p:txBody>
+      </p:sp>
     </p:spTree>
   </p:cSld>
   <p:clrMapOvr>
@@ -4200,7 +3735,7 @@
                 </a:solidFill>
                 <a:latin typeface="IBM Plex Sans"/>
               </a:rPr>
-              <a:t>Året i fire kvartaler</a:t>
+              <a:t>Billede til venstre, tekst til højre</a:t>
             </a:r>
           </a:p>
         </p:txBody>
@@ -4257,8 +3792,63 @@
         </p:nvSpPr>
         <p:spPr>
           <a:xfrm>
-            <a:off x="822960" y="2514600"/>
-            <a:ext cx="2526715" cy="38100"/>
+            <a:off x="603504" y="1554480"/>
+            <a:ext cx="5029200" cy="4480560"/>
+          </a:xfrm>
+          <a:prstGeom prst="rect">
+            <a:avLst/>
+          </a:prstGeom>
+          <a:solidFill>
+            <a:srgbClr val="E8E8E3"/>
+          </a:solidFill>
+          <a:ln w="25400">
+            <a:solidFill>
+              <a:srgbClr val="000000"/>
+            </a:solidFill>
+          </a:ln>
+          <a:effectLst/>
+        </p:spPr>
+        <p:style>
+          <a:lnRef idx="1">
+            <a:schemeClr val="accent1"/>
+          </a:lnRef>
+          <a:fillRef idx="3">
+            <a:schemeClr val="accent1"/>
+          </a:fillRef>
+          <a:effectRef idx="2">
+            <a:schemeClr val="accent1"/>
+          </a:effectRef>
+          <a:fontRef idx="minor">
+            <a:schemeClr val="lt1"/>
+          </a:fontRef>
+        </p:style>
+        <p:txBody>
+          <a:bodyPr rtlCol="0" anchor="ctr" wrap="square"/>
+          <a:lstStyle/>
+          <a:p>
+            <a:pPr algn="ctr"/>
+            <a:r>
+              <a:rPr sz="1200" b="1" spc="120">
+                <a:solidFill>
+                  <a:srgbClr val="6B6B6B"/>
+                </a:solidFill>
+                <a:latin typeface="IBM Plex Mono"/>
+              </a:rPr>
+              <a:t>BILLEDE</a:t>
+            </a:r>
+          </a:p>
+        </p:txBody>
+      </p:sp>
+      <p:sp>
+        <p:nvSpPr>
+          <p:cNvPr id="7" name="Rectangle 6"/>
+          <p:cNvSpPr/>
+          <p:nvPr/>
+        </p:nvSpPr>
+        <p:spPr>
+          <a:xfrm>
+            <a:off x="6519672" y="1630680"/>
+            <a:ext cx="139700" cy="139700"/>
           </a:xfrm>
           <a:prstGeom prst="rect">
             <a:avLst/>
@@ -4295,60 +3885,14 @@
       </p:sp>
       <p:sp>
         <p:nvSpPr>
-          <p:cNvPr id="7" name="Rectangle 6"/>
-          <p:cNvSpPr/>
-          <p:nvPr/>
-        </p:nvSpPr>
-        <p:spPr>
-          <a:xfrm>
-            <a:off x="603504" y="2423160"/>
-            <a:ext cx="237744" cy="237744"/>
-          </a:xfrm>
-          <a:prstGeom prst="rect">
-            <a:avLst/>
-          </a:prstGeom>
-          <a:solidFill>
-            <a:srgbClr val="FFFFFF"/>
-          </a:solidFill>
-          <a:ln w="38100">
-            <a:solidFill>
-              <a:srgbClr val="000000"/>
-            </a:solidFill>
-          </a:ln>
-          <a:effectLst/>
-        </p:spPr>
-        <p:style>
-          <a:lnRef idx="1">
-            <a:schemeClr val="accent1"/>
-          </a:lnRef>
-          <a:fillRef idx="3">
-            <a:schemeClr val="accent1"/>
-          </a:fillRef>
-          <a:effectRef idx="2">
-            <a:schemeClr val="accent1"/>
-          </a:effectRef>
-          <a:fontRef idx="minor">
-            <a:schemeClr val="lt1"/>
-          </a:fontRef>
-        </p:style>
-        <p:txBody>
-          <a:bodyPr rtlCol="0" anchor="ctr"/>
-          <a:lstStyle/>
-          <a:p>
-            <a:pPr algn="ctr"/>
-          </a:p>
-        </p:txBody>
-      </p:sp>
-      <p:sp>
-        <p:nvSpPr>
           <p:cNvPr id="8" name="TextBox 7"/>
           <p:cNvSpPr txBox="1"/>
           <p:nvPr/>
         </p:nvSpPr>
         <p:spPr>
           <a:xfrm>
-            <a:off x="603504" y="2834640"/>
-            <a:ext cx="2563291" cy="365760"/>
+            <a:off x="6885432" y="1554480"/>
+            <a:ext cx="4663440" cy="822960"/>
           </a:xfrm>
           <a:prstGeom prst="rect">
             <a:avLst/>
@@ -4361,103 +3905,33 @@
           </a:bodyPr>
           <a:lstStyle/>
           <a:p>
-            <a:pPr algn="l"/>
-            <a:r>
-              <a:rPr sz="1300" b="1" spc="120">
-                <a:solidFill>
-                  <a:srgbClr val="6B6B6B"/>
-                </a:solidFill>
-                <a:latin typeface="IBM Plex Mono"/>
-              </a:rPr>
-              <a:t>Q1</a:t>
-            </a:r>
-          </a:p>
-        </p:txBody>
-      </p:sp>
-      <p:sp>
-        <p:nvSpPr>
-          <p:cNvPr id="9" name="TextBox 8"/>
-          <p:cNvSpPr txBox="1"/>
-          <p:nvPr/>
-        </p:nvSpPr>
-        <p:spPr>
-          <a:xfrm>
-            <a:off x="603504" y="3200400"/>
-            <a:ext cx="2563291" cy="457200"/>
-          </a:xfrm>
-          <a:prstGeom prst="rect">
-            <a:avLst/>
-          </a:prstGeom>
-          <a:noFill/>
-        </p:spPr>
-        <p:txBody>
-          <a:bodyPr wrap="square">
-            <a:spAutoFit/>
-          </a:bodyPr>
-          <a:lstStyle/>
-          <a:p>
-            <a:pPr algn="l"/>
-            <a:r>
-              <a:rPr sz="1800" b="1">
-                <a:solidFill>
-                  <a:srgbClr val="000000"/>
-                </a:solidFill>
-                <a:latin typeface="IBM Plex Sans"/>
-              </a:rPr>
-              <a:t>Analyse</a:t>
-            </a:r>
-          </a:p>
-        </p:txBody>
-      </p:sp>
-      <p:sp>
-        <p:nvSpPr>
-          <p:cNvPr id="10" name="TextBox 9"/>
-          <p:cNvSpPr txBox="1"/>
-          <p:nvPr/>
-        </p:nvSpPr>
-        <p:spPr>
-          <a:xfrm>
-            <a:off x="603504" y="3703320"/>
-            <a:ext cx="2517571" cy="1463040"/>
-          </a:xfrm>
-          <a:prstGeom prst="rect">
-            <a:avLst/>
-          </a:prstGeom>
-          <a:noFill/>
-        </p:spPr>
-        <p:txBody>
-          <a:bodyPr wrap="square">
-            <a:spAutoFit/>
-          </a:bodyPr>
-          <a:lstStyle/>
-          <a:p>
             <a:pPr algn="l">
               <a:lnSpc>
-                <a:spcPct val="125000"/>
+                <a:spcPct val="115000"/>
               </a:lnSpc>
             </a:pPr>
             <a:r>
-              <a:rPr sz="1400" b="0">
+              <a:rPr sz="2000" b="0">
                 <a:solidFill>
                   <a:srgbClr val="333333"/>
                 </a:solidFill>
                 <a:latin typeface="IBM Plex Sans"/>
               </a:rPr>
-              <a:t>Behov afdækkes.</a:t>
-            </a:r>
-          </a:p>
-        </p:txBody>
-      </p:sp>
-      <p:sp>
-        <p:nvSpPr>
-          <p:cNvPr id="11" name="Rectangle 10"/>
+              <a:t>Halv-til-halv layout med skarpt billed-felt.</a:t>
+            </a:r>
+          </a:p>
+        </p:txBody>
+      </p:sp>
+      <p:sp>
+        <p:nvSpPr>
+          <p:cNvPr id="9" name="Rectangle 8"/>
           <p:cNvSpPr/>
           <p:nvPr/>
         </p:nvSpPr>
         <p:spPr>
           <a:xfrm>
-            <a:off x="3569131" y="2514600"/>
-            <a:ext cx="2526715" cy="38100"/>
+            <a:off x="6519672" y="2499360"/>
+            <a:ext cx="139700" cy="139700"/>
           </a:xfrm>
           <a:prstGeom prst="rect">
             <a:avLst/>
@@ -4494,25 +3968,62 @@
       </p:sp>
       <p:sp>
         <p:nvSpPr>
-          <p:cNvPr id="12" name="Rectangle 11"/>
+          <p:cNvPr id="10" name="TextBox 9"/>
+          <p:cNvSpPr txBox="1"/>
+          <p:nvPr/>
+        </p:nvSpPr>
+        <p:spPr>
+          <a:xfrm>
+            <a:off x="6885432" y="2423160"/>
+            <a:ext cx="4663440" cy="822960"/>
+          </a:xfrm>
+          <a:prstGeom prst="rect">
+            <a:avLst/>
+          </a:prstGeom>
+          <a:noFill/>
+        </p:spPr>
+        <p:txBody>
+          <a:bodyPr wrap="square">
+            <a:spAutoFit/>
+          </a:bodyPr>
+          <a:lstStyle/>
+          <a:p>
+            <a:pPr algn="l">
+              <a:lnSpc>
+                <a:spcPct val="115000"/>
+              </a:lnSpc>
+            </a:pPr>
+            <a:r>
+              <a:rPr sz="2000" b="0">
+                <a:solidFill>
+                  <a:srgbClr val="333333"/>
+                </a:solidFill>
+                <a:latin typeface="IBM Plex Sans"/>
+              </a:rPr>
+              <a:t>image_left=True spejler layoutet.</a:t>
+            </a:r>
+          </a:p>
+        </p:txBody>
+      </p:sp>
+      <p:sp>
+        <p:nvSpPr>
+          <p:cNvPr id="11" name="Rectangle 10"/>
           <p:cNvSpPr/>
           <p:nvPr/>
         </p:nvSpPr>
         <p:spPr>
           <a:xfrm>
-            <a:off x="3349675" y="2423160"/>
-            <a:ext cx="237744" cy="237744"/>
+            <a:off x="6519672" y="3368040"/>
+            <a:ext cx="139700" cy="139700"/>
           </a:xfrm>
           <a:prstGeom prst="rect">
             <a:avLst/>
           </a:prstGeom>
           <a:solidFill>
-            <a:srgbClr val="FFFFFF"/>
+            <a:srgbClr val="ED5E66"/>
           </a:solidFill>
-          <a:ln w="38100">
-            <a:solidFill>
-              <a:srgbClr val="000000"/>
-            </a:solidFill>
+          <a:ln>
+            <a:noFill/>
           </a:ln>
           <a:effectLst/>
         </p:spPr>
@@ -4540,14 +4051,14 @@
       </p:sp>
       <p:sp>
         <p:nvSpPr>
-          <p:cNvPr id="13" name="TextBox 12"/>
+          <p:cNvPr id="12" name="TextBox 11"/>
           <p:cNvSpPr txBox="1"/>
           <p:nvPr/>
         </p:nvSpPr>
         <p:spPr>
           <a:xfrm>
-            <a:off x="3349675" y="2834640"/>
-            <a:ext cx="2563291" cy="365760"/>
+            <a:off x="6885432" y="3291840"/>
+            <a:ext cx="4663440" cy="822960"/>
           </a:xfrm>
           <a:prstGeom prst="rect">
             <a:avLst/>
@@ -4560,450 +4071,26 @@
           </a:bodyPr>
           <a:lstStyle/>
           <a:p>
-            <a:pPr algn="l"/>
-            <a:r>
-              <a:rPr sz="1300" b="1" spc="120">
-                <a:solidFill>
-                  <a:srgbClr val="6B6B6B"/>
-                </a:solidFill>
-                <a:latin typeface="IBM Plex Mono"/>
-              </a:rPr>
-              <a:t>Q2</a:t>
-            </a:r>
-          </a:p>
-        </p:txBody>
-      </p:sp>
-      <p:sp>
-        <p:nvSpPr>
-          <p:cNvPr id="14" name="TextBox 13"/>
-          <p:cNvSpPr txBox="1"/>
-          <p:nvPr/>
-        </p:nvSpPr>
-        <p:spPr>
-          <a:xfrm>
-            <a:off x="3349675" y="3200400"/>
-            <a:ext cx="2563291" cy="457200"/>
-          </a:xfrm>
-          <a:prstGeom prst="rect">
-            <a:avLst/>
-          </a:prstGeom>
-          <a:noFill/>
-        </p:spPr>
-        <p:txBody>
-          <a:bodyPr wrap="square">
-            <a:spAutoFit/>
-          </a:bodyPr>
-          <a:lstStyle/>
-          <a:p>
-            <a:pPr algn="l"/>
-            <a:r>
-              <a:rPr sz="1800" b="1">
-                <a:solidFill>
-                  <a:srgbClr val="000000"/>
-                </a:solidFill>
-                <a:latin typeface="IBM Plex Sans"/>
-              </a:rPr>
-              <a:t>Design</a:t>
-            </a:r>
-          </a:p>
-        </p:txBody>
-      </p:sp>
-      <p:sp>
-        <p:nvSpPr>
-          <p:cNvPr id="15" name="TextBox 14"/>
-          <p:cNvSpPr txBox="1"/>
-          <p:nvPr/>
-        </p:nvSpPr>
-        <p:spPr>
-          <a:xfrm>
-            <a:off x="3349675" y="3703320"/>
-            <a:ext cx="2517571" cy="1463040"/>
-          </a:xfrm>
-          <a:prstGeom prst="rect">
-            <a:avLst/>
-          </a:prstGeom>
-          <a:noFill/>
-        </p:spPr>
-        <p:txBody>
-          <a:bodyPr wrap="square">
-            <a:spAutoFit/>
-          </a:bodyPr>
-          <a:lstStyle/>
-          <a:p>
             <a:pPr algn="l">
               <a:lnSpc>
-                <a:spcPct val="125000"/>
+                <a:spcPct val="115000"/>
               </a:lnSpc>
             </a:pPr>
             <a:r>
-              <a:rPr sz="1400" b="0">
+              <a:rPr sz="2000" b="0">
                 <a:solidFill>
                   <a:srgbClr val="333333"/>
                 </a:solidFill>
                 <a:latin typeface="IBM Plex Sans"/>
               </a:rPr>
-              <a:t>Løsninger formes.</a:t>
-            </a:r>
-          </a:p>
-        </p:txBody>
-      </p:sp>
-      <p:sp>
-        <p:nvSpPr>
-          <p:cNvPr id="16" name="Rectangle 15"/>
-          <p:cNvSpPr/>
-          <p:nvPr/>
-        </p:nvSpPr>
-        <p:spPr>
-          <a:xfrm>
-            <a:off x="6315302" y="2514600"/>
-            <a:ext cx="2526715" cy="38100"/>
-          </a:xfrm>
-          <a:prstGeom prst="rect">
-            <a:avLst/>
-          </a:prstGeom>
-          <a:solidFill>
-            <a:srgbClr val="000000"/>
-          </a:solidFill>
-          <a:ln>
-            <a:noFill/>
-          </a:ln>
-          <a:effectLst/>
-        </p:spPr>
-        <p:style>
-          <a:lnRef idx="1">
-            <a:schemeClr val="accent1"/>
-          </a:lnRef>
-          <a:fillRef idx="3">
-            <a:schemeClr val="accent1"/>
-          </a:fillRef>
-          <a:effectRef idx="2">
-            <a:schemeClr val="accent1"/>
-          </a:effectRef>
-          <a:fontRef idx="minor">
-            <a:schemeClr val="lt1"/>
-          </a:fontRef>
-        </p:style>
-        <p:txBody>
-          <a:bodyPr rtlCol="0" anchor="ctr"/>
-          <a:lstStyle/>
-          <a:p>
-            <a:pPr algn="ctr"/>
-          </a:p>
-        </p:txBody>
-      </p:sp>
-      <p:sp>
-        <p:nvSpPr>
-          <p:cNvPr id="17" name="Rectangle 16"/>
-          <p:cNvSpPr/>
-          <p:nvPr/>
-        </p:nvSpPr>
-        <p:spPr>
-          <a:xfrm>
-            <a:off x="6095846" y="2423160"/>
-            <a:ext cx="237744" cy="237744"/>
-          </a:xfrm>
-          <a:prstGeom prst="rect">
-            <a:avLst/>
-          </a:prstGeom>
-          <a:solidFill>
-            <a:srgbClr val="ED5E66"/>
-          </a:solidFill>
-          <a:ln w="38100">
-            <a:solidFill>
-              <a:srgbClr val="ED5E66"/>
-            </a:solidFill>
-          </a:ln>
-          <a:effectLst/>
-        </p:spPr>
-        <p:style>
-          <a:lnRef idx="1">
-            <a:schemeClr val="accent1"/>
-          </a:lnRef>
-          <a:fillRef idx="3">
-            <a:schemeClr val="accent1"/>
-          </a:fillRef>
-          <a:effectRef idx="2">
-            <a:schemeClr val="accent1"/>
-          </a:effectRef>
-          <a:fontRef idx="minor">
-            <a:schemeClr val="lt1"/>
-          </a:fontRef>
-        </p:style>
-        <p:txBody>
-          <a:bodyPr rtlCol="0" anchor="ctr"/>
-          <a:lstStyle/>
-          <a:p>
-            <a:pPr algn="ctr"/>
-          </a:p>
-        </p:txBody>
-      </p:sp>
-      <p:sp>
-        <p:nvSpPr>
-          <p:cNvPr id="18" name="TextBox 17"/>
-          <p:cNvSpPr txBox="1"/>
-          <p:nvPr/>
-        </p:nvSpPr>
-        <p:spPr>
-          <a:xfrm>
-            <a:off x="6095846" y="2834640"/>
-            <a:ext cx="2563291" cy="365760"/>
-          </a:xfrm>
-          <a:prstGeom prst="rect">
-            <a:avLst/>
-          </a:prstGeom>
-          <a:noFill/>
-        </p:spPr>
-        <p:txBody>
-          <a:bodyPr wrap="square">
-            <a:spAutoFit/>
-          </a:bodyPr>
-          <a:lstStyle/>
-          <a:p>
-            <a:pPr algn="l"/>
-            <a:r>
-              <a:rPr sz="1300" b="1" spc="120">
-                <a:solidFill>
-                  <a:srgbClr val="6B6B6B"/>
-                </a:solidFill>
-                <a:latin typeface="IBM Plex Mono"/>
-              </a:rPr>
-              <a:t>Q3</a:t>
-            </a:r>
-          </a:p>
-        </p:txBody>
-      </p:sp>
-      <p:sp>
-        <p:nvSpPr>
-          <p:cNvPr id="19" name="TextBox 18"/>
-          <p:cNvSpPr txBox="1"/>
-          <p:nvPr/>
-        </p:nvSpPr>
-        <p:spPr>
-          <a:xfrm>
-            <a:off x="6095846" y="3200400"/>
-            <a:ext cx="2563291" cy="457200"/>
-          </a:xfrm>
-          <a:prstGeom prst="rect">
-            <a:avLst/>
-          </a:prstGeom>
-          <a:noFill/>
-        </p:spPr>
-        <p:txBody>
-          <a:bodyPr wrap="square">
-            <a:spAutoFit/>
-          </a:bodyPr>
-          <a:lstStyle/>
-          <a:p>
-            <a:pPr algn="l"/>
-            <a:r>
-              <a:rPr sz="1800" b="1">
-                <a:solidFill>
-                  <a:srgbClr val="000000"/>
-                </a:solidFill>
-                <a:latin typeface="IBM Plex Sans"/>
-              </a:rPr>
-              <a:t>Udrulning</a:t>
-            </a:r>
-          </a:p>
-        </p:txBody>
-      </p:sp>
-      <p:sp>
-        <p:nvSpPr>
-          <p:cNvPr id="20" name="TextBox 19"/>
-          <p:cNvSpPr txBox="1"/>
-          <p:nvPr/>
-        </p:nvSpPr>
-        <p:spPr>
-          <a:xfrm>
-            <a:off x="6095846" y="3703320"/>
-            <a:ext cx="2517571" cy="1463040"/>
-          </a:xfrm>
-          <a:prstGeom prst="rect">
-            <a:avLst/>
-          </a:prstGeom>
-          <a:noFill/>
-        </p:spPr>
-        <p:txBody>
-          <a:bodyPr wrap="square">
-            <a:spAutoFit/>
-          </a:bodyPr>
-          <a:lstStyle/>
-          <a:p>
-            <a:pPr algn="l">
-              <a:lnSpc>
-                <a:spcPct val="125000"/>
-              </a:lnSpc>
-            </a:pPr>
-            <a:r>
-              <a:rPr sz="1400" b="0">
-                <a:solidFill>
-                  <a:srgbClr val="333333"/>
-                </a:solidFill>
-                <a:latin typeface="IBM Plex Sans"/>
-              </a:rPr>
-              <a:t>Vi er her nu.</a:t>
-            </a:r>
-          </a:p>
-        </p:txBody>
-      </p:sp>
-      <p:sp>
-        <p:nvSpPr>
-          <p:cNvPr id="21" name="Rectangle 20"/>
-          <p:cNvSpPr/>
-          <p:nvPr/>
-        </p:nvSpPr>
-        <p:spPr>
-          <a:xfrm>
-            <a:off x="8842017" y="2423160"/>
-            <a:ext cx="237744" cy="237744"/>
-          </a:xfrm>
-          <a:prstGeom prst="rect">
-            <a:avLst/>
-          </a:prstGeom>
-          <a:solidFill>
-            <a:srgbClr val="FFFFFF"/>
-          </a:solidFill>
-          <a:ln w="38100">
-            <a:solidFill>
-              <a:srgbClr val="000000"/>
-            </a:solidFill>
-          </a:ln>
-          <a:effectLst/>
-        </p:spPr>
-        <p:style>
-          <a:lnRef idx="1">
-            <a:schemeClr val="accent1"/>
-          </a:lnRef>
-          <a:fillRef idx="3">
-            <a:schemeClr val="accent1"/>
-          </a:fillRef>
-          <a:effectRef idx="2">
-            <a:schemeClr val="accent1"/>
-          </a:effectRef>
-          <a:fontRef idx="minor">
-            <a:schemeClr val="lt1"/>
-          </a:fontRef>
-        </p:style>
-        <p:txBody>
-          <a:bodyPr rtlCol="0" anchor="ctr"/>
-          <a:lstStyle/>
-          <a:p>
-            <a:pPr algn="ctr"/>
-          </a:p>
-        </p:txBody>
-      </p:sp>
-      <p:sp>
-        <p:nvSpPr>
-          <p:cNvPr id="22" name="TextBox 21"/>
-          <p:cNvSpPr txBox="1"/>
-          <p:nvPr/>
-        </p:nvSpPr>
-        <p:spPr>
-          <a:xfrm>
-            <a:off x="8842017" y="2834640"/>
-            <a:ext cx="2563291" cy="365760"/>
-          </a:xfrm>
-          <a:prstGeom prst="rect">
-            <a:avLst/>
-          </a:prstGeom>
-          <a:noFill/>
-        </p:spPr>
-        <p:txBody>
-          <a:bodyPr wrap="square">
-            <a:spAutoFit/>
-          </a:bodyPr>
-          <a:lstStyle/>
-          <a:p>
-            <a:pPr algn="l"/>
-            <a:r>
-              <a:rPr sz="1300" b="1" spc="120">
-                <a:solidFill>
-                  <a:srgbClr val="6B6B6B"/>
-                </a:solidFill>
-                <a:latin typeface="IBM Plex Mono"/>
-              </a:rPr>
-              <a:t>Q4</a:t>
-            </a:r>
-          </a:p>
-        </p:txBody>
-      </p:sp>
-      <p:sp>
-        <p:nvSpPr>
-          <p:cNvPr id="23" name="TextBox 22"/>
-          <p:cNvSpPr txBox="1"/>
-          <p:nvPr/>
-        </p:nvSpPr>
-        <p:spPr>
-          <a:xfrm>
-            <a:off x="8842017" y="3200400"/>
-            <a:ext cx="2563291" cy="457200"/>
-          </a:xfrm>
-          <a:prstGeom prst="rect">
-            <a:avLst/>
-          </a:prstGeom>
-          <a:noFill/>
-        </p:spPr>
-        <p:txBody>
-          <a:bodyPr wrap="square">
-            <a:spAutoFit/>
-          </a:bodyPr>
-          <a:lstStyle/>
-          <a:p>
-            <a:pPr algn="l"/>
-            <a:r>
-              <a:rPr sz="1800" b="1">
-                <a:solidFill>
-                  <a:srgbClr val="000000"/>
-                </a:solidFill>
-                <a:latin typeface="IBM Plex Sans"/>
-              </a:rPr>
-              <a:t>Evaluering</a:t>
-            </a:r>
-          </a:p>
-        </p:txBody>
-      </p:sp>
-      <p:sp>
-        <p:nvSpPr>
-          <p:cNvPr id="24" name="TextBox 23"/>
-          <p:cNvSpPr txBox="1"/>
-          <p:nvPr/>
-        </p:nvSpPr>
-        <p:spPr>
-          <a:xfrm>
-            <a:off x="8842017" y="3703320"/>
-            <a:ext cx="2517571" cy="1463040"/>
-          </a:xfrm>
-          <a:prstGeom prst="rect">
-            <a:avLst/>
-          </a:prstGeom>
-          <a:noFill/>
-        </p:spPr>
-        <p:txBody>
-          <a:bodyPr wrap="square">
-            <a:spAutoFit/>
-          </a:bodyPr>
-          <a:lstStyle/>
-          <a:p>
-            <a:pPr algn="l">
-              <a:lnSpc>
-                <a:spcPct val="125000"/>
-              </a:lnSpc>
-            </a:pPr>
-            <a:r>
-              <a:rPr sz="1400" b="0">
-                <a:solidFill>
-                  <a:srgbClr val="333333"/>
-                </a:solidFill>
-                <a:latin typeface="IBM Plex Sans"/>
-              </a:rPr>
-              <a:t>Læring og justering.</a:t>
+              <a:t>Billedet får 2px sort kant som alt andet.</a:t>
             </a:r>
           </a:p>
         </p:txBody>
       </p:sp>
       <p:pic>
         <p:nvPicPr>
-          <p:cNvPr id="25" name="Picture 24" descr="oes-logo-green.png"/>
+          <p:cNvPr id="13" name="Picture 12" descr="oes-logo-green.png"/>
           <p:cNvPicPr>
             <a:picLocks noChangeAspect="1"/>
           </p:cNvPicPr>
@@ -5139,47 +4226,8 @@
         </p:nvSpPr>
         <p:spPr>
           <a:xfrm>
-            <a:off x="603504" y="1554480"/>
-            <a:ext cx="10984687" cy="2560320"/>
-          </a:xfrm>
-          <a:prstGeom prst="rect">
-            <a:avLst/>
-          </a:prstGeom>
-          <a:noFill/>
-        </p:spPr>
-        <p:txBody>
-          <a:bodyPr wrap="none">
-            <a:normAutofit/>
-          </a:bodyPr>
-          <a:lstStyle/>
-          <a:p>
-            <a:pPr algn="l">
-              <a:lnSpc>
-                <a:spcPct val="90000"/>
-              </a:lnSpc>
-            </a:pPr>
-            <a:r>
-              <a:rPr sz="15000" b="1">
-                <a:solidFill>
-                  <a:srgbClr val="066B43"/>
-                </a:solidFill>
-                <a:latin typeface="IBM Plex Mono"/>
-              </a:rPr>
-              <a:t>+18%</a:t>
-            </a:r>
-          </a:p>
-        </p:txBody>
-      </p:sp>
-      <p:sp>
-        <p:nvSpPr>
-          <p:cNvPr id="5" name="TextBox 4"/>
-          <p:cNvSpPr txBox="1"/>
-          <p:nvPr/>
-        </p:nvSpPr>
-        <p:spPr>
-          <a:xfrm>
-            <a:off x="603504" y="4389120"/>
-            <a:ext cx="8229600" cy="914400"/>
+            <a:off x="603504" y="457200"/>
+            <a:ext cx="10984687" cy="731520"/>
           </a:xfrm>
           <a:prstGeom prst="rect">
             <a:avLst/>
@@ -5194,59 +4242,398 @@
           <a:p>
             <a:pPr algn="l">
               <a:lnSpc>
-                <a:spcPct val="120000"/>
+                <a:spcPct val="105000"/>
               </a:lnSpc>
             </a:pPr>
             <a:r>
-              <a:rPr sz="2400" b="0">
+              <a:rPr sz="4200" b="1">
                 <a:solidFill>
-                  <a:srgbClr val="333333"/>
+                  <a:srgbClr val="000000"/>
                 </a:solidFill>
                 <a:latin typeface="IBM Plex Sans"/>
               </a:rPr>
-              <a:t>Effektivisering år over år — positivt tal bærer ØS-grøn.</a:t>
-            </a:r>
-          </a:p>
-        </p:txBody>
-      </p:sp>
-      <p:sp>
-        <p:nvSpPr>
-          <p:cNvPr id="6" name="TextBox 5"/>
-          <p:cNvSpPr txBox="1"/>
-          <p:nvPr/>
-        </p:nvSpPr>
-        <p:spPr>
-          <a:xfrm>
-            <a:off x="603504" y="6263640"/>
-            <a:ext cx="9144000" cy="320040"/>
-          </a:xfrm>
-          <a:prstGeom prst="rect">
-            <a:avLst/>
-          </a:prstGeom>
-          <a:noFill/>
-        </p:spPr>
-        <p:txBody>
-          <a:bodyPr wrap="square">
-            <a:spAutoFit/>
-          </a:bodyPr>
-          <a:lstStyle/>
-          <a:p>
-            <a:pPr algn="l"/>
-            <a:r>
-              <a:rPr sz="1300" b="1" spc="120">
+              <a:t>Billed-grid</a:t>
+            </a:r>
+          </a:p>
+        </p:txBody>
+      </p:sp>
+      <p:sp>
+        <p:nvSpPr>
+          <p:cNvPr id="5" name="Rectangle 4"/>
+          <p:cNvSpPr/>
+          <p:nvPr/>
+        </p:nvSpPr>
+        <p:spPr>
+          <a:xfrm>
+            <a:off x="694944" y="1044244"/>
+            <a:ext cx="640080" cy="76200"/>
+          </a:xfrm>
+          <a:prstGeom prst="rect">
+            <a:avLst/>
+          </a:prstGeom>
+          <a:solidFill>
+            <a:srgbClr val="066B43"/>
+          </a:solidFill>
+          <a:ln>
+            <a:noFill/>
+          </a:ln>
+          <a:effectLst/>
+        </p:spPr>
+        <p:style>
+          <a:lnRef idx="1">
+            <a:schemeClr val="accent1"/>
+          </a:lnRef>
+          <a:fillRef idx="3">
+            <a:schemeClr val="accent1"/>
+          </a:fillRef>
+          <a:effectRef idx="2">
+            <a:schemeClr val="accent1"/>
+          </a:effectRef>
+          <a:fontRef idx="minor">
+            <a:schemeClr val="lt1"/>
+          </a:fontRef>
+        </p:style>
+        <p:txBody>
+          <a:bodyPr rtlCol="0" anchor="ctr"/>
+          <a:lstStyle/>
+          <a:p>
+            <a:pPr algn="ctr"/>
+          </a:p>
+        </p:txBody>
+      </p:sp>
+      <p:sp>
+        <p:nvSpPr>
+          <p:cNvPr id="6" name="Rectangle 5"/>
+          <p:cNvSpPr/>
+          <p:nvPr/>
+        </p:nvSpPr>
+        <p:spPr>
+          <a:xfrm>
+            <a:off x="603504" y="1554480"/>
+            <a:ext cx="3509162" cy="2125980"/>
+          </a:xfrm>
+          <a:prstGeom prst="rect">
+            <a:avLst/>
+          </a:prstGeom>
+          <a:solidFill>
+            <a:srgbClr val="E8E8E3"/>
+          </a:solidFill>
+          <a:ln w="25400">
+            <a:solidFill>
+              <a:srgbClr val="000000"/>
+            </a:solidFill>
+          </a:ln>
+          <a:effectLst/>
+        </p:spPr>
+        <p:style>
+          <a:lnRef idx="1">
+            <a:schemeClr val="accent1"/>
+          </a:lnRef>
+          <a:fillRef idx="3">
+            <a:schemeClr val="accent1"/>
+          </a:fillRef>
+          <a:effectRef idx="2">
+            <a:schemeClr val="accent1"/>
+          </a:effectRef>
+          <a:fontRef idx="minor">
+            <a:schemeClr val="lt1"/>
+          </a:fontRef>
+        </p:style>
+        <p:txBody>
+          <a:bodyPr rtlCol="0" anchor="ctr" wrap="square"/>
+          <a:lstStyle/>
+          <a:p>
+            <a:pPr algn="ctr"/>
+            <a:r>
+              <a:rPr sz="1200" b="1" spc="120">
                 <a:solidFill>
                   <a:srgbClr val="6B6B6B"/>
                 </a:solidFill>
                 <a:latin typeface="IBM Plex Mono"/>
               </a:rPr>
-              <a:t>KILDE: STATENS REGNSKAB, 2026</a:t>
+              <a:t>01</a:t>
+            </a:r>
+          </a:p>
+        </p:txBody>
+      </p:sp>
+      <p:sp>
+        <p:nvSpPr>
+          <p:cNvPr id="7" name="Rectangle 6"/>
+          <p:cNvSpPr/>
+          <p:nvPr/>
+        </p:nvSpPr>
+        <p:spPr>
+          <a:xfrm>
+            <a:off x="4341266" y="1554480"/>
+            <a:ext cx="3509162" cy="2125980"/>
+          </a:xfrm>
+          <a:prstGeom prst="rect">
+            <a:avLst/>
+          </a:prstGeom>
+          <a:solidFill>
+            <a:srgbClr val="E8E8E3"/>
+          </a:solidFill>
+          <a:ln w="25400">
+            <a:solidFill>
+              <a:srgbClr val="000000"/>
+            </a:solidFill>
+          </a:ln>
+          <a:effectLst/>
+        </p:spPr>
+        <p:style>
+          <a:lnRef idx="1">
+            <a:schemeClr val="accent1"/>
+          </a:lnRef>
+          <a:fillRef idx="3">
+            <a:schemeClr val="accent1"/>
+          </a:fillRef>
+          <a:effectRef idx="2">
+            <a:schemeClr val="accent1"/>
+          </a:effectRef>
+          <a:fontRef idx="minor">
+            <a:schemeClr val="lt1"/>
+          </a:fontRef>
+        </p:style>
+        <p:txBody>
+          <a:bodyPr rtlCol="0" anchor="ctr" wrap="square"/>
+          <a:lstStyle/>
+          <a:p>
+            <a:pPr algn="ctr"/>
+            <a:r>
+              <a:rPr sz="1200" b="1" spc="120">
+                <a:solidFill>
+                  <a:srgbClr val="6B6B6B"/>
+                </a:solidFill>
+                <a:latin typeface="IBM Plex Mono"/>
+              </a:rPr>
+              <a:t>02</a:t>
+            </a:r>
+          </a:p>
+        </p:txBody>
+      </p:sp>
+      <p:sp>
+        <p:nvSpPr>
+          <p:cNvPr id="8" name="Rectangle 7"/>
+          <p:cNvSpPr/>
+          <p:nvPr/>
+        </p:nvSpPr>
+        <p:spPr>
+          <a:xfrm>
+            <a:off x="8079028" y="1554480"/>
+            <a:ext cx="3509162" cy="2125980"/>
+          </a:xfrm>
+          <a:prstGeom prst="rect">
+            <a:avLst/>
+          </a:prstGeom>
+          <a:solidFill>
+            <a:srgbClr val="E8E8E3"/>
+          </a:solidFill>
+          <a:ln w="25400">
+            <a:solidFill>
+              <a:srgbClr val="000000"/>
+            </a:solidFill>
+          </a:ln>
+          <a:effectLst/>
+        </p:spPr>
+        <p:style>
+          <a:lnRef idx="1">
+            <a:schemeClr val="accent1"/>
+          </a:lnRef>
+          <a:fillRef idx="3">
+            <a:schemeClr val="accent1"/>
+          </a:fillRef>
+          <a:effectRef idx="2">
+            <a:schemeClr val="accent1"/>
+          </a:effectRef>
+          <a:fontRef idx="minor">
+            <a:schemeClr val="lt1"/>
+          </a:fontRef>
+        </p:style>
+        <p:txBody>
+          <a:bodyPr rtlCol="0" anchor="ctr" wrap="square"/>
+          <a:lstStyle/>
+          <a:p>
+            <a:pPr algn="ctr"/>
+            <a:r>
+              <a:rPr sz="1200" b="1" spc="120">
+                <a:solidFill>
+                  <a:srgbClr val="6B6B6B"/>
+                </a:solidFill>
+                <a:latin typeface="IBM Plex Mono"/>
+              </a:rPr>
+              <a:t>03</a:t>
+            </a:r>
+          </a:p>
+        </p:txBody>
+      </p:sp>
+      <p:sp>
+        <p:nvSpPr>
+          <p:cNvPr id="9" name="Rectangle 8"/>
+          <p:cNvSpPr/>
+          <p:nvPr/>
+        </p:nvSpPr>
+        <p:spPr>
+          <a:xfrm>
+            <a:off x="603504" y="3909060"/>
+            <a:ext cx="3509162" cy="2125980"/>
+          </a:xfrm>
+          <a:prstGeom prst="rect">
+            <a:avLst/>
+          </a:prstGeom>
+          <a:solidFill>
+            <a:srgbClr val="E8E8E3"/>
+          </a:solidFill>
+          <a:ln w="25400">
+            <a:solidFill>
+              <a:srgbClr val="000000"/>
+            </a:solidFill>
+          </a:ln>
+          <a:effectLst/>
+        </p:spPr>
+        <p:style>
+          <a:lnRef idx="1">
+            <a:schemeClr val="accent1"/>
+          </a:lnRef>
+          <a:fillRef idx="3">
+            <a:schemeClr val="accent1"/>
+          </a:fillRef>
+          <a:effectRef idx="2">
+            <a:schemeClr val="accent1"/>
+          </a:effectRef>
+          <a:fontRef idx="minor">
+            <a:schemeClr val="lt1"/>
+          </a:fontRef>
+        </p:style>
+        <p:txBody>
+          <a:bodyPr rtlCol="0" anchor="ctr" wrap="square"/>
+          <a:lstStyle/>
+          <a:p>
+            <a:pPr algn="ctr"/>
+            <a:r>
+              <a:rPr sz="1200" b="1" spc="120">
+                <a:solidFill>
+                  <a:srgbClr val="6B6B6B"/>
+                </a:solidFill>
+                <a:latin typeface="IBM Plex Mono"/>
+              </a:rPr>
+              <a:t>04</a:t>
+            </a:r>
+          </a:p>
+        </p:txBody>
+      </p:sp>
+      <p:sp>
+        <p:nvSpPr>
+          <p:cNvPr id="10" name="Rectangle 9"/>
+          <p:cNvSpPr/>
+          <p:nvPr/>
+        </p:nvSpPr>
+        <p:spPr>
+          <a:xfrm>
+            <a:off x="4341266" y="3909060"/>
+            <a:ext cx="3509162" cy="2125980"/>
+          </a:xfrm>
+          <a:prstGeom prst="rect">
+            <a:avLst/>
+          </a:prstGeom>
+          <a:solidFill>
+            <a:srgbClr val="E8E8E3"/>
+          </a:solidFill>
+          <a:ln w="25400">
+            <a:solidFill>
+              <a:srgbClr val="000000"/>
+            </a:solidFill>
+          </a:ln>
+          <a:effectLst/>
+        </p:spPr>
+        <p:style>
+          <a:lnRef idx="1">
+            <a:schemeClr val="accent1"/>
+          </a:lnRef>
+          <a:fillRef idx="3">
+            <a:schemeClr val="accent1"/>
+          </a:fillRef>
+          <a:effectRef idx="2">
+            <a:schemeClr val="accent1"/>
+          </a:effectRef>
+          <a:fontRef idx="minor">
+            <a:schemeClr val="lt1"/>
+          </a:fontRef>
+        </p:style>
+        <p:txBody>
+          <a:bodyPr rtlCol="0" anchor="ctr" wrap="square"/>
+          <a:lstStyle/>
+          <a:p>
+            <a:pPr algn="ctr"/>
+            <a:r>
+              <a:rPr sz="1200" b="1" spc="120">
+                <a:solidFill>
+                  <a:srgbClr val="6B6B6B"/>
+                </a:solidFill>
+                <a:latin typeface="IBM Plex Mono"/>
+              </a:rPr>
+              <a:t>05</a:t>
+            </a:r>
+          </a:p>
+        </p:txBody>
+      </p:sp>
+      <p:sp>
+        <p:nvSpPr>
+          <p:cNvPr id="11" name="Rectangle 10"/>
+          <p:cNvSpPr/>
+          <p:nvPr/>
+        </p:nvSpPr>
+        <p:spPr>
+          <a:xfrm>
+            <a:off x="8079028" y="3909060"/>
+            <a:ext cx="3509162" cy="2125980"/>
+          </a:xfrm>
+          <a:prstGeom prst="rect">
+            <a:avLst/>
+          </a:prstGeom>
+          <a:solidFill>
+            <a:srgbClr val="E8E8E3"/>
+          </a:solidFill>
+          <a:ln w="25400">
+            <a:solidFill>
+              <a:srgbClr val="000000"/>
+            </a:solidFill>
+          </a:ln>
+          <a:effectLst/>
+        </p:spPr>
+        <p:style>
+          <a:lnRef idx="1">
+            <a:schemeClr val="accent1"/>
+          </a:lnRef>
+          <a:fillRef idx="3">
+            <a:schemeClr val="accent1"/>
+          </a:fillRef>
+          <a:effectRef idx="2">
+            <a:schemeClr val="accent1"/>
+          </a:effectRef>
+          <a:fontRef idx="minor">
+            <a:schemeClr val="lt1"/>
+          </a:fontRef>
+        </p:style>
+        <p:txBody>
+          <a:bodyPr rtlCol="0" anchor="ctr" wrap="square"/>
+          <a:lstStyle/>
+          <a:p>
+            <a:pPr algn="ctr"/>
+            <a:r>
+              <a:rPr sz="1200" b="1" spc="120">
+                <a:solidFill>
+                  <a:srgbClr val="6B6B6B"/>
+                </a:solidFill>
+                <a:latin typeface="IBM Plex Mono"/>
+              </a:rPr>
+              <a:t>06</a:t>
             </a:r>
           </a:p>
         </p:txBody>
       </p:sp>
       <p:pic>
         <p:nvPicPr>
-          <p:cNvPr id="7" name="Picture 6" descr="oes-logo-green.png"/>
+          <p:cNvPr id="12" name="Picture 11" descr="oes-logo-green.png"/>
           <p:cNvPicPr>
             <a:picLocks noChangeAspect="1"/>
           </p:cNvPicPr>
@@ -5408,7 +4795,7 @@
                 </a:solidFill>
                 <a:latin typeface="IBM Plex Sans"/>
               </a:rPr>
-              <a:t>Budget pr. område</a:t>
+              <a:t>Tre indsatsområder</a:t>
             </a:r>
           </a:p>
         </p:txBody>
@@ -5459,49 +4846,14 @@
       </p:sp>
       <p:sp>
         <p:nvSpPr>
-          <p:cNvPr id="6" name="TextBox 5"/>
-          <p:cNvSpPr txBox="1"/>
-          <p:nvPr/>
-        </p:nvSpPr>
-        <p:spPr>
-          <a:xfrm>
-            <a:off x="603504" y="1627632"/>
-            <a:ext cx="2011680" cy="365760"/>
-          </a:xfrm>
-          <a:prstGeom prst="rect">
-            <a:avLst/>
-          </a:prstGeom>
-          <a:noFill/>
-        </p:spPr>
-        <p:txBody>
-          <a:bodyPr wrap="square">
-            <a:spAutoFit/>
-          </a:bodyPr>
-          <a:lstStyle/>
-          <a:p>
-            <a:pPr algn="l"/>
-            <a:r>
-              <a:rPr sz="1700" b="0">
-                <a:solidFill>
-                  <a:srgbClr val="000000"/>
-                </a:solidFill>
-                <a:latin typeface="IBM Plex Sans"/>
-              </a:rPr>
-              <a:t>Drift</a:t>
-            </a:r>
-          </a:p>
-        </p:txBody>
-      </p:sp>
-      <p:sp>
-        <p:nvSpPr>
-          <p:cNvPr id="7" name="Rectangle 6"/>
+          <p:cNvPr id="6" name="Rectangle 5"/>
           <p:cNvSpPr/>
           <p:nvPr/>
         </p:nvSpPr>
         <p:spPr>
           <a:xfrm>
-            <a:off x="2615184" y="1554480"/>
-            <a:ext cx="7784287" cy="502920"/>
+            <a:off x="603504" y="2148840"/>
+            <a:ext cx="3448202" cy="3291840"/>
           </a:xfrm>
           <a:prstGeom prst="rect">
             <a:avLst/>
@@ -5514,7 +4866,11 @@
               <a:srgbClr val="000000"/>
             </a:solidFill>
           </a:ln>
-          <a:effectLst/>
+          <a:effectLst>
+            <a:outerShdw blurRad="0" dist="38100" dir="2700000" rotWithShape="0">
+              <a:srgbClr val="000000"/>
+            </a:outerShdw>
+          </a:effectLst>
         </p:spPr>
         <p:style>
           <a:lnRef idx="1">
@@ -5540,14 +4896,14 @@
       </p:sp>
       <p:sp>
         <p:nvSpPr>
-          <p:cNvPr id="8" name="Rectangle 7"/>
+          <p:cNvPr id="7" name="Rectangle 6"/>
           <p:cNvSpPr/>
           <p:nvPr/>
         </p:nvSpPr>
         <p:spPr>
           <a:xfrm>
-            <a:off x="2615184" y="1554480"/>
-            <a:ext cx="7784287" cy="502920"/>
+            <a:off x="877824" y="2423160"/>
+            <a:ext cx="457200" cy="457200"/>
           </a:xfrm>
           <a:prstGeom prst="rect">
             <a:avLst/>
@@ -5584,14 +4940,14 @@
       </p:sp>
       <p:sp>
         <p:nvSpPr>
-          <p:cNvPr id="9" name="TextBox 8"/>
+          <p:cNvPr id="8" name="TextBox 7"/>
           <p:cNvSpPr txBox="1"/>
           <p:nvPr/>
         </p:nvSpPr>
         <p:spPr>
           <a:xfrm>
-            <a:off x="10536631" y="1627632"/>
-            <a:ext cx="1005840" cy="365760"/>
+            <a:off x="877824" y="3063240"/>
+            <a:ext cx="2899562" cy="548640"/>
           </a:xfrm>
           <a:prstGeom prst="rect">
             <a:avLst/>
@@ -5604,51 +4960,105 @@
           </a:bodyPr>
           <a:lstStyle/>
           <a:p>
-            <a:pPr algn="r"/>
-            <a:r>
-              <a:rPr sz="1700" b="1">
-                <a:solidFill>
-                  <a:srgbClr val="000000"/>
-                </a:solidFill>
-                <a:latin typeface="IBM Plex Mono"/>
-              </a:rPr>
-              <a:t>240</a:t>
-            </a:r>
-          </a:p>
-        </p:txBody>
-      </p:sp>
-      <p:sp>
-        <p:nvSpPr>
-          <p:cNvPr id="10" name="TextBox 9"/>
-          <p:cNvSpPr txBox="1"/>
-          <p:nvPr/>
-        </p:nvSpPr>
-        <p:spPr>
-          <a:xfrm>
-            <a:off x="603504" y="2450592"/>
-            <a:ext cx="2011680" cy="365760"/>
-          </a:xfrm>
-          <a:prstGeom prst="rect">
-            <a:avLst/>
-          </a:prstGeom>
-          <a:noFill/>
-        </p:spPr>
-        <p:txBody>
-          <a:bodyPr wrap="square">
-            <a:spAutoFit/>
-          </a:bodyPr>
-          <a:lstStyle/>
-          <a:p>
             <a:pPr algn="l"/>
             <a:r>
-              <a:rPr sz="1700" b="0">
+              <a:rPr sz="2200" b="1">
                 <a:solidFill>
                   <a:srgbClr val="000000"/>
                 </a:solidFill>
                 <a:latin typeface="IBM Plex Sans"/>
               </a:rPr>
-              <a:t>Udvikling</a:t>
-            </a:r>
+              <a:t>Effektivitet</a:t>
+            </a:r>
+          </a:p>
+        </p:txBody>
+      </p:sp>
+      <p:sp>
+        <p:nvSpPr>
+          <p:cNvPr id="9" name="TextBox 8"/>
+          <p:cNvSpPr txBox="1"/>
+          <p:nvPr/>
+        </p:nvSpPr>
+        <p:spPr>
+          <a:xfrm>
+            <a:off x="877824" y="3611880"/>
+            <a:ext cx="2899562" cy="1645920"/>
+          </a:xfrm>
+          <a:prstGeom prst="rect">
+            <a:avLst/>
+          </a:prstGeom>
+          <a:noFill/>
+        </p:spPr>
+        <p:txBody>
+          <a:bodyPr wrap="square">
+            <a:spAutoFit/>
+          </a:bodyPr>
+          <a:lstStyle/>
+          <a:p>
+            <a:pPr algn="l">
+              <a:lnSpc>
+                <a:spcPct val="130000"/>
+              </a:lnSpc>
+            </a:pPr>
+            <a:r>
+              <a:rPr sz="1600" b="0">
+                <a:solidFill>
+                  <a:srgbClr val="333333"/>
+                </a:solidFill>
+                <a:latin typeface="IBM Plex Sans"/>
+              </a:rPr>
+              <a:t>Færre manuelle trin gennem automatisering.</a:t>
+            </a:r>
+          </a:p>
+        </p:txBody>
+      </p:sp>
+      <p:sp>
+        <p:nvSpPr>
+          <p:cNvPr id="10" name="Rectangle 9"/>
+          <p:cNvSpPr/>
+          <p:nvPr/>
+        </p:nvSpPr>
+        <p:spPr>
+          <a:xfrm>
+            <a:off x="4371746" y="2148840"/>
+            <a:ext cx="3448202" cy="3291840"/>
+          </a:xfrm>
+          <a:prstGeom prst="rect">
+            <a:avLst/>
+          </a:prstGeom>
+          <a:solidFill>
+            <a:srgbClr val="FEF3C7"/>
+          </a:solidFill>
+          <a:ln w="25400">
+            <a:solidFill>
+              <a:srgbClr val="000000"/>
+            </a:solidFill>
+          </a:ln>
+          <a:effectLst>
+            <a:outerShdw blurRad="0" dist="38100" dir="2700000" rotWithShape="0">
+              <a:srgbClr val="000000"/>
+            </a:outerShdw>
+          </a:effectLst>
+        </p:spPr>
+        <p:style>
+          <a:lnRef idx="1">
+            <a:schemeClr val="accent1"/>
+          </a:lnRef>
+          <a:fillRef idx="3">
+            <a:schemeClr val="accent1"/>
+          </a:fillRef>
+          <a:effectRef idx="2">
+            <a:schemeClr val="accent1"/>
+          </a:effectRef>
+          <a:fontRef idx="minor">
+            <a:schemeClr val="lt1"/>
+          </a:fontRef>
+        </p:style>
+        <p:txBody>
+          <a:bodyPr rtlCol="0" anchor="ctr"/>
+          <a:lstStyle/>
+          <a:p>
+            <a:pPr algn="ctr"/>
           </a:p>
         </p:txBody>
       </p:sp>
@@ -5660,8 +5070,126 @@
         </p:nvSpPr>
         <p:spPr>
           <a:xfrm>
-            <a:off x="2615184" y="2377440"/>
-            <a:ext cx="7784287" cy="502920"/>
+            <a:off x="4646066" y="2423160"/>
+            <a:ext cx="457200" cy="457200"/>
+          </a:xfrm>
+          <a:prstGeom prst="rect">
+            <a:avLst/>
+          </a:prstGeom>
+          <a:solidFill>
+            <a:srgbClr val="ED5E66"/>
+          </a:solidFill>
+          <a:ln>
+            <a:noFill/>
+          </a:ln>
+          <a:effectLst/>
+        </p:spPr>
+        <p:style>
+          <a:lnRef idx="1">
+            <a:schemeClr val="accent1"/>
+          </a:lnRef>
+          <a:fillRef idx="3">
+            <a:schemeClr val="accent1"/>
+          </a:fillRef>
+          <a:effectRef idx="2">
+            <a:schemeClr val="accent1"/>
+          </a:effectRef>
+          <a:fontRef idx="minor">
+            <a:schemeClr val="lt1"/>
+          </a:fontRef>
+        </p:style>
+        <p:txBody>
+          <a:bodyPr rtlCol="0" anchor="ctr"/>
+          <a:lstStyle/>
+          <a:p>
+            <a:pPr algn="ctr"/>
+          </a:p>
+        </p:txBody>
+      </p:sp>
+      <p:sp>
+        <p:nvSpPr>
+          <p:cNvPr id="12" name="TextBox 11"/>
+          <p:cNvSpPr txBox="1"/>
+          <p:nvPr/>
+        </p:nvSpPr>
+        <p:spPr>
+          <a:xfrm>
+            <a:off x="4646066" y="3063240"/>
+            <a:ext cx="2899562" cy="548640"/>
+          </a:xfrm>
+          <a:prstGeom prst="rect">
+            <a:avLst/>
+          </a:prstGeom>
+          <a:noFill/>
+        </p:spPr>
+        <p:txBody>
+          <a:bodyPr wrap="square">
+            <a:spAutoFit/>
+          </a:bodyPr>
+          <a:lstStyle/>
+          <a:p>
+            <a:pPr algn="l"/>
+            <a:r>
+              <a:rPr sz="2200" b="1">
+                <a:solidFill>
+                  <a:srgbClr val="000000"/>
+                </a:solidFill>
+                <a:latin typeface="IBM Plex Sans"/>
+              </a:rPr>
+              <a:t>Gennemsigtighed</a:t>
+            </a:r>
+          </a:p>
+        </p:txBody>
+      </p:sp>
+      <p:sp>
+        <p:nvSpPr>
+          <p:cNvPr id="13" name="TextBox 12"/>
+          <p:cNvSpPr txBox="1"/>
+          <p:nvPr/>
+        </p:nvSpPr>
+        <p:spPr>
+          <a:xfrm>
+            <a:off x="4646066" y="3611880"/>
+            <a:ext cx="2899562" cy="1645920"/>
+          </a:xfrm>
+          <a:prstGeom prst="rect">
+            <a:avLst/>
+          </a:prstGeom>
+          <a:noFill/>
+        </p:spPr>
+        <p:txBody>
+          <a:bodyPr wrap="square">
+            <a:spAutoFit/>
+          </a:bodyPr>
+          <a:lstStyle/>
+          <a:p>
+            <a:pPr algn="l">
+              <a:lnSpc>
+                <a:spcPct val="130000"/>
+              </a:lnSpc>
+            </a:pPr>
+            <a:r>
+              <a:rPr sz="1600" b="0">
+                <a:solidFill>
+                  <a:srgbClr val="333333"/>
+                </a:solidFill>
+                <a:latin typeface="IBM Plex Sans"/>
+              </a:rPr>
+              <a:t>Det fremhævede kort — gul flade, kun ét per slide.</a:t>
+            </a:r>
+          </a:p>
+        </p:txBody>
+      </p:sp>
+      <p:sp>
+        <p:nvSpPr>
+          <p:cNvPr id="14" name="Rectangle 13"/>
+          <p:cNvSpPr/>
+          <p:nvPr/>
+        </p:nvSpPr>
+        <p:spPr>
+          <a:xfrm>
+            <a:off x="8139988" y="2148840"/>
+            <a:ext cx="3448202" cy="3291840"/>
           </a:xfrm>
           <a:prstGeom prst="rect">
             <a:avLst/>
@@ -5674,7 +5202,11 @@
               <a:srgbClr val="000000"/>
             </a:solidFill>
           </a:ln>
-          <a:effectLst/>
+          <a:effectLst>
+            <a:outerShdw blurRad="0" dist="38100" dir="2700000" rotWithShape="0">
+              <a:srgbClr val="000000"/>
+            </a:outerShdw>
+          </a:effectLst>
         </p:spPr>
         <p:style>
           <a:lnRef idx="1">
@@ -5700,174 +5232,14 @@
       </p:sp>
       <p:sp>
         <p:nvSpPr>
-          <p:cNvPr id="12" name="Rectangle 11"/>
-          <p:cNvSpPr/>
-          <p:nvPr/>
-        </p:nvSpPr>
-        <p:spPr>
-          <a:xfrm>
-            <a:off x="2615184" y="2377440"/>
-            <a:ext cx="3814300" cy="502920"/>
-          </a:xfrm>
-          <a:prstGeom prst="rect">
-            <a:avLst/>
-          </a:prstGeom>
-          <a:solidFill>
-            <a:srgbClr val="ED5E66"/>
-          </a:solidFill>
-          <a:ln>
-            <a:noFill/>
-          </a:ln>
-          <a:effectLst/>
-        </p:spPr>
-        <p:style>
-          <a:lnRef idx="1">
-            <a:schemeClr val="accent1"/>
-          </a:lnRef>
-          <a:fillRef idx="3">
-            <a:schemeClr val="accent1"/>
-          </a:fillRef>
-          <a:effectRef idx="2">
-            <a:schemeClr val="accent1"/>
-          </a:effectRef>
-          <a:fontRef idx="minor">
-            <a:schemeClr val="lt1"/>
-          </a:fontRef>
-        </p:style>
-        <p:txBody>
-          <a:bodyPr rtlCol="0" anchor="ctr"/>
-          <a:lstStyle/>
-          <a:p>
-            <a:pPr algn="ctr"/>
-          </a:p>
-        </p:txBody>
-      </p:sp>
-      <p:sp>
-        <p:nvSpPr>
-          <p:cNvPr id="13" name="TextBox 12"/>
-          <p:cNvSpPr txBox="1"/>
-          <p:nvPr/>
-        </p:nvSpPr>
-        <p:spPr>
-          <a:xfrm>
-            <a:off x="10536631" y="2450592"/>
-            <a:ext cx="1005840" cy="365760"/>
-          </a:xfrm>
-          <a:prstGeom prst="rect">
-            <a:avLst/>
-          </a:prstGeom>
-          <a:noFill/>
-        </p:spPr>
-        <p:txBody>
-          <a:bodyPr wrap="square">
-            <a:spAutoFit/>
-          </a:bodyPr>
-          <a:lstStyle/>
-          <a:p>
-            <a:pPr algn="r"/>
-            <a:r>
-              <a:rPr sz="1700" b="1">
-                <a:solidFill>
-                  <a:srgbClr val="000000"/>
-                </a:solidFill>
-                <a:latin typeface="IBM Plex Mono"/>
-              </a:rPr>
-              <a:t>118</a:t>
-            </a:r>
-          </a:p>
-        </p:txBody>
-      </p:sp>
-      <p:sp>
-        <p:nvSpPr>
-          <p:cNvPr id="14" name="TextBox 13"/>
-          <p:cNvSpPr txBox="1"/>
-          <p:nvPr/>
-        </p:nvSpPr>
-        <p:spPr>
-          <a:xfrm>
-            <a:off x="603504" y="3273552"/>
-            <a:ext cx="2011680" cy="365760"/>
-          </a:xfrm>
-          <a:prstGeom prst="rect">
-            <a:avLst/>
-          </a:prstGeom>
-          <a:noFill/>
-        </p:spPr>
-        <p:txBody>
-          <a:bodyPr wrap="square">
-            <a:spAutoFit/>
-          </a:bodyPr>
-          <a:lstStyle/>
-          <a:p>
-            <a:pPr algn="l"/>
-            <a:r>
-              <a:rPr sz="1700" b="0">
-                <a:solidFill>
-                  <a:srgbClr val="000000"/>
-                </a:solidFill>
-                <a:latin typeface="IBM Plex Sans"/>
-              </a:rPr>
-              <a:t>Support</a:t>
-            </a:r>
-          </a:p>
-        </p:txBody>
-      </p:sp>
-      <p:sp>
-        <p:nvSpPr>
           <p:cNvPr id="15" name="Rectangle 14"/>
           <p:cNvSpPr/>
           <p:nvPr/>
         </p:nvSpPr>
         <p:spPr>
           <a:xfrm>
-            <a:off x="2615184" y="3200400"/>
-            <a:ext cx="7784287" cy="502920"/>
-          </a:xfrm>
-          <a:prstGeom prst="rect">
-            <a:avLst/>
-          </a:prstGeom>
-          <a:solidFill>
-            <a:srgbClr val="FFFFFF"/>
-          </a:solidFill>
-          <a:ln w="25400">
-            <a:solidFill>
-              <a:srgbClr val="000000"/>
-            </a:solidFill>
-          </a:ln>
-          <a:effectLst/>
-        </p:spPr>
-        <p:style>
-          <a:lnRef idx="1">
-            <a:schemeClr val="accent1"/>
-          </a:lnRef>
-          <a:fillRef idx="3">
-            <a:schemeClr val="accent1"/>
-          </a:fillRef>
-          <a:effectRef idx="2">
-            <a:schemeClr val="accent1"/>
-          </a:effectRef>
-          <a:fontRef idx="minor">
-            <a:schemeClr val="lt1"/>
-          </a:fontRef>
-        </p:style>
-        <p:txBody>
-          <a:bodyPr rtlCol="0" anchor="ctr"/>
-          <a:lstStyle/>
-          <a:p>
-            <a:pPr algn="ctr"/>
-          </a:p>
-        </p:txBody>
-      </p:sp>
-      <p:sp>
-        <p:nvSpPr>
-          <p:cNvPr id="16" name="Rectangle 15"/>
-          <p:cNvSpPr/>
-          <p:nvPr/>
-        </p:nvSpPr>
-        <p:spPr>
-          <a:xfrm>
-            <a:off x="2615184" y="3200400"/>
-            <a:ext cx="2101757" cy="502920"/>
+            <a:off x="8414308" y="2423160"/>
+            <a:ext cx="457200" cy="457200"/>
           </a:xfrm>
           <a:prstGeom prst="rect">
             <a:avLst/>
@@ -5904,14 +5276,14 @@
       </p:sp>
       <p:sp>
         <p:nvSpPr>
-          <p:cNvPr id="17" name="TextBox 16"/>
+          <p:cNvPr id="16" name="TextBox 15"/>
           <p:cNvSpPr txBox="1"/>
           <p:nvPr/>
         </p:nvSpPr>
         <p:spPr>
           <a:xfrm>
-            <a:off x="10536631" y="3273552"/>
-            <a:ext cx="1005840" cy="365760"/>
+            <a:off x="8414308" y="3063240"/>
+            <a:ext cx="2899562" cy="548640"/>
           </a:xfrm>
           <a:prstGeom prst="rect">
             <a:avLst/>
@@ -5924,29 +5296,29 @@
           </a:bodyPr>
           <a:lstStyle/>
           <a:p>
-            <a:pPr algn="r"/>
-            <a:r>
-              <a:rPr sz="1700" b="1">
+            <a:pPr algn="l"/>
+            <a:r>
+              <a:rPr sz="2200" b="1">
                 <a:solidFill>
                   <a:srgbClr val="000000"/>
                 </a:solidFill>
-                <a:latin typeface="IBM Plex Mono"/>
+                <a:latin typeface="IBM Plex Sans"/>
               </a:rPr>
-              <a:t>64</a:t>
-            </a:r>
-          </a:p>
-        </p:txBody>
-      </p:sp>
-      <p:sp>
-        <p:nvSpPr>
-          <p:cNvPr id="18" name="TextBox 17"/>
+              <a:t>Datagrundlag</a:t>
+            </a:r>
+          </a:p>
+        </p:txBody>
+      </p:sp>
+      <p:sp>
+        <p:nvSpPr>
+          <p:cNvPr id="17" name="TextBox 16"/>
           <p:cNvSpPr txBox="1"/>
           <p:nvPr/>
         </p:nvSpPr>
         <p:spPr>
           <a:xfrm>
-            <a:off x="603504" y="6263640"/>
-            <a:ext cx="9144000" cy="320040"/>
+            <a:off x="8414308" y="3611880"/>
+            <a:ext cx="2899562" cy="1645920"/>
           </a:xfrm>
           <a:prstGeom prst="rect">
             <a:avLst/>
@@ -5959,22 +5331,26 @@
           </a:bodyPr>
           <a:lstStyle/>
           <a:p>
-            <a:pPr algn="l"/>
-            <a:r>
-              <a:rPr sz="1300" b="1" spc="120">
+            <a:pPr algn="l">
+              <a:lnSpc>
+                <a:spcPct val="130000"/>
+              </a:lnSpc>
+            </a:pPr>
+            <a:r>
+              <a:rPr sz="1600" b="0">
                 <a:solidFill>
-                  <a:srgbClr val="6B6B6B"/>
+                  <a:srgbClr val="333333"/>
                 </a:solidFill>
-                <a:latin typeface="IBM Plex Mono"/>
+                <a:latin typeface="IBM Plex Sans"/>
               </a:rPr>
-              <a:t>KILDE: STATENS REGNSKAB, 2026</a:t>
+              <a:t>Bedre tal til politiske beslutninger.</a:t>
             </a:r>
           </a:p>
         </p:txBody>
       </p:sp>
       <p:pic>
         <p:nvPicPr>
-          <p:cNvPr id="19" name="Picture 18" descr="oes-logo-green.png"/>
+          <p:cNvPr id="18" name="Picture 17" descr="oes-logo-green.png"/>
           <p:cNvPicPr>
             <a:picLocks noChangeAspect="1"/>
           </p:cNvPicPr>
@@ -6104,22 +5480,149 @@
       </p:sp>
       <p:sp>
         <p:nvSpPr>
-          <p:cNvPr id="4" name="Rectangle 3"/>
+          <p:cNvPr id="4" name="TextBox 3"/>
+          <p:cNvSpPr txBox="1"/>
+          <p:nvPr/>
+        </p:nvSpPr>
+        <p:spPr>
+          <a:xfrm>
+            <a:off x="603504" y="457200"/>
+            <a:ext cx="10984687" cy="731520"/>
+          </a:xfrm>
+          <a:prstGeom prst="rect">
+            <a:avLst/>
+          </a:prstGeom>
+          <a:noFill/>
+        </p:spPr>
+        <p:txBody>
+          <a:bodyPr wrap="square">
+            <a:spAutoFit/>
+          </a:bodyPr>
+          <a:lstStyle/>
+          <a:p>
+            <a:pPr algn="l">
+              <a:lnSpc>
+                <a:spcPct val="105000"/>
+              </a:lnSpc>
+            </a:pPr>
+            <a:r>
+              <a:rPr sz="4200" b="1">
+                <a:solidFill>
+                  <a:srgbClr val="000000"/>
+                </a:solidFill>
+                <a:latin typeface="IBM Plex Sans"/>
+              </a:rPr>
+              <a:t>Året i fire kvartaler</a:t>
+            </a:r>
+          </a:p>
+        </p:txBody>
+      </p:sp>
+      <p:sp>
+        <p:nvSpPr>
+          <p:cNvPr id="5" name="Rectangle 4"/>
           <p:cNvSpPr/>
           <p:nvPr/>
         </p:nvSpPr>
         <p:spPr>
           <a:xfrm>
-            <a:off x="603504" y="1828800"/>
-            <a:ext cx="2377440" cy="2377440"/>
+            <a:off x="694944" y="1044244"/>
+            <a:ext cx="640080" cy="76200"/>
           </a:xfrm>
           <a:prstGeom prst="rect">
             <a:avLst/>
           </a:prstGeom>
           <a:solidFill>
-            <a:srgbClr val="E8E8E3"/>
+            <a:srgbClr val="066B43"/>
           </a:solidFill>
-          <a:ln w="25400">
+          <a:ln>
+            <a:noFill/>
+          </a:ln>
+          <a:effectLst/>
+        </p:spPr>
+        <p:style>
+          <a:lnRef idx="1">
+            <a:schemeClr val="accent1"/>
+          </a:lnRef>
+          <a:fillRef idx="3">
+            <a:schemeClr val="accent1"/>
+          </a:fillRef>
+          <a:effectRef idx="2">
+            <a:schemeClr val="accent1"/>
+          </a:effectRef>
+          <a:fontRef idx="minor">
+            <a:schemeClr val="lt1"/>
+          </a:fontRef>
+        </p:style>
+        <p:txBody>
+          <a:bodyPr rtlCol="0" anchor="ctr"/>
+          <a:lstStyle/>
+          <a:p>
+            <a:pPr algn="ctr"/>
+          </a:p>
+        </p:txBody>
+      </p:sp>
+      <p:sp>
+        <p:nvSpPr>
+          <p:cNvPr id="6" name="Rectangle 5"/>
+          <p:cNvSpPr/>
+          <p:nvPr/>
+        </p:nvSpPr>
+        <p:spPr>
+          <a:xfrm>
+            <a:off x="822960" y="2514600"/>
+            <a:ext cx="2526715" cy="38100"/>
+          </a:xfrm>
+          <a:prstGeom prst="rect">
+            <a:avLst/>
+          </a:prstGeom>
+          <a:solidFill>
+            <a:srgbClr val="000000"/>
+          </a:solidFill>
+          <a:ln>
+            <a:noFill/>
+          </a:ln>
+          <a:effectLst/>
+        </p:spPr>
+        <p:style>
+          <a:lnRef idx="1">
+            <a:schemeClr val="accent1"/>
+          </a:lnRef>
+          <a:fillRef idx="3">
+            <a:schemeClr val="accent1"/>
+          </a:fillRef>
+          <a:effectRef idx="2">
+            <a:schemeClr val="accent1"/>
+          </a:effectRef>
+          <a:fontRef idx="minor">
+            <a:schemeClr val="lt1"/>
+          </a:fontRef>
+        </p:style>
+        <p:txBody>
+          <a:bodyPr rtlCol="0" anchor="ctr"/>
+          <a:lstStyle/>
+          <a:p>
+            <a:pPr algn="ctr"/>
+          </a:p>
+        </p:txBody>
+      </p:sp>
+      <p:sp>
+        <p:nvSpPr>
+          <p:cNvPr id="7" name="Rectangle 6"/>
+          <p:cNvSpPr/>
+          <p:nvPr/>
+        </p:nvSpPr>
+        <p:spPr>
+          <a:xfrm>
+            <a:off x="603504" y="2423160"/>
+            <a:ext cx="237744" cy="237744"/>
+          </a:xfrm>
+          <a:prstGeom prst="rect">
+            <a:avLst/>
+          </a:prstGeom>
+          <a:solidFill>
+            <a:srgbClr val="FFFFFF"/>
+          </a:solidFill>
+          <a:ln w="38100">
             <a:solidFill>
               <a:srgbClr val="000000"/>
             </a:solidFill>
@@ -6141,115 +5644,58 @@
           </a:fontRef>
         </p:style>
         <p:txBody>
-          <a:bodyPr rtlCol="0" anchor="ctr" wrap="square"/>
+          <a:bodyPr rtlCol="0" anchor="ctr"/>
           <a:lstStyle/>
           <a:p>
             <a:pPr algn="ctr"/>
-            <a:r>
-              <a:rPr sz="1200" b="1" spc="120">
+          </a:p>
+        </p:txBody>
+      </p:sp>
+      <p:sp>
+        <p:nvSpPr>
+          <p:cNvPr id="8" name="TextBox 7"/>
+          <p:cNvSpPr txBox="1"/>
+          <p:nvPr/>
+        </p:nvSpPr>
+        <p:spPr>
+          <a:xfrm>
+            <a:off x="603504" y="2834640"/>
+            <a:ext cx="2563291" cy="365760"/>
+          </a:xfrm>
+          <a:prstGeom prst="rect">
+            <a:avLst/>
+          </a:prstGeom>
+          <a:noFill/>
+        </p:spPr>
+        <p:txBody>
+          <a:bodyPr wrap="square">
+            <a:spAutoFit/>
+          </a:bodyPr>
+          <a:lstStyle/>
+          <a:p>
+            <a:pPr algn="l"/>
+            <a:r>
+              <a:rPr sz="1300" b="1" spc="120">
                 <a:solidFill>
                   <a:srgbClr val="6B6B6B"/>
                 </a:solidFill>
                 <a:latin typeface="IBM Plex Mono"/>
               </a:rPr>
-              <a:t>PORTRÆT</a:t>
-            </a:r>
-          </a:p>
-        </p:txBody>
-      </p:sp>
-      <p:sp>
-        <p:nvSpPr>
-          <p:cNvPr id="5" name="Rectangle 4"/>
-          <p:cNvSpPr/>
-          <p:nvPr/>
-        </p:nvSpPr>
-        <p:spPr>
-          <a:xfrm>
-            <a:off x="3657600" y="1828800"/>
-            <a:ext cx="76200" cy="1828800"/>
-          </a:xfrm>
-          <a:prstGeom prst="rect">
-            <a:avLst/>
-          </a:prstGeom>
-          <a:solidFill>
-            <a:srgbClr val="ED5E66"/>
-          </a:solidFill>
-          <a:ln>
-            <a:noFill/>
-          </a:ln>
-          <a:effectLst/>
-        </p:spPr>
-        <p:style>
-          <a:lnRef idx="1">
-            <a:schemeClr val="accent1"/>
-          </a:lnRef>
-          <a:fillRef idx="3">
-            <a:schemeClr val="accent1"/>
-          </a:fillRef>
-          <a:effectRef idx="2">
-            <a:schemeClr val="accent1"/>
-          </a:effectRef>
-          <a:fontRef idx="minor">
-            <a:schemeClr val="lt1"/>
-          </a:fontRef>
-        </p:style>
-        <p:txBody>
-          <a:bodyPr rtlCol="0" anchor="ctr"/>
-          <a:lstStyle/>
-          <a:p>
-            <a:pPr algn="ctr"/>
-          </a:p>
-        </p:txBody>
-      </p:sp>
-      <p:sp>
-        <p:nvSpPr>
-          <p:cNvPr id="6" name="TextBox 5"/>
+              <a:t>Q1</a:t>
+            </a:r>
+          </a:p>
+        </p:txBody>
+      </p:sp>
+      <p:sp>
+        <p:nvSpPr>
+          <p:cNvPr id="9" name="TextBox 8"/>
           <p:cNvSpPr txBox="1"/>
           <p:nvPr/>
         </p:nvSpPr>
         <p:spPr>
           <a:xfrm>
-            <a:off x="3931920" y="1828800"/>
-            <a:ext cx="7315200" cy="2011680"/>
-          </a:xfrm>
-          <a:prstGeom prst="rect">
-            <a:avLst/>
-          </a:prstGeom>
-          <a:noFill/>
-        </p:spPr>
-        <p:txBody>
-          <a:bodyPr wrap="square">
-            <a:spAutoFit/>
-          </a:bodyPr>
-          <a:lstStyle/>
-          <a:p>
-            <a:pPr algn="l">
-              <a:lnSpc>
-                <a:spcPct val="120000"/>
-              </a:lnSpc>
-            </a:pPr>
-            <a:r>
-              <a:rPr sz="3000" b="1">
-                <a:solidFill>
-                  <a:srgbClr val="000000"/>
-                </a:solidFill>
-                <a:latin typeface="IBM Plex Sans"/>
-              </a:rPr>
-              <a:t>“Gode beslutninger bygger på pålidelige tal.”</a:t>
-            </a:r>
-          </a:p>
-        </p:txBody>
-      </p:sp>
-      <p:sp>
-        <p:nvSpPr>
-          <p:cNvPr id="7" name="TextBox 6"/>
-          <p:cNvSpPr txBox="1"/>
-          <p:nvPr/>
-        </p:nvSpPr>
-        <p:spPr>
-          <a:xfrm>
-            <a:off x="3931920" y="3931920"/>
-            <a:ext cx="7315200" cy="457200"/>
+            <a:off x="603504" y="3200400"/>
+            <a:ext cx="2563291" cy="457200"/>
           </a:xfrm>
           <a:prstGeom prst="rect">
             <a:avLst/>
@@ -6270,21 +5716,150 @@
                 </a:solidFill>
                 <a:latin typeface="IBM Plex Sans"/>
               </a:rPr>
-              <a:t>Økonomistyrelsen</a:t>
-            </a:r>
-          </a:p>
-        </p:txBody>
-      </p:sp>
-      <p:sp>
-        <p:nvSpPr>
-          <p:cNvPr id="8" name="TextBox 7"/>
+              <a:t>Analyse</a:t>
+            </a:r>
+          </a:p>
+        </p:txBody>
+      </p:sp>
+      <p:sp>
+        <p:nvSpPr>
+          <p:cNvPr id="10" name="TextBox 9"/>
           <p:cNvSpPr txBox="1"/>
           <p:nvPr/>
         </p:nvSpPr>
         <p:spPr>
           <a:xfrm>
-            <a:off x="3931920" y="4389120"/>
-            <a:ext cx="7315200" cy="365760"/>
+            <a:off x="603504" y="3703320"/>
+            <a:ext cx="2517571" cy="1463040"/>
+          </a:xfrm>
+          <a:prstGeom prst="rect">
+            <a:avLst/>
+          </a:prstGeom>
+          <a:noFill/>
+        </p:spPr>
+        <p:txBody>
+          <a:bodyPr wrap="square">
+            <a:spAutoFit/>
+          </a:bodyPr>
+          <a:lstStyle/>
+          <a:p>
+            <a:pPr algn="l">
+              <a:lnSpc>
+                <a:spcPct val="125000"/>
+              </a:lnSpc>
+            </a:pPr>
+            <a:r>
+              <a:rPr sz="1400" b="0">
+                <a:solidFill>
+                  <a:srgbClr val="333333"/>
+                </a:solidFill>
+                <a:latin typeface="IBM Plex Sans"/>
+              </a:rPr>
+              <a:t>Behov afdækkes.</a:t>
+            </a:r>
+          </a:p>
+        </p:txBody>
+      </p:sp>
+      <p:sp>
+        <p:nvSpPr>
+          <p:cNvPr id="11" name="Rectangle 10"/>
+          <p:cNvSpPr/>
+          <p:nvPr/>
+        </p:nvSpPr>
+        <p:spPr>
+          <a:xfrm>
+            <a:off x="3569131" y="2514600"/>
+            <a:ext cx="2526715" cy="38100"/>
+          </a:xfrm>
+          <a:prstGeom prst="rect">
+            <a:avLst/>
+          </a:prstGeom>
+          <a:solidFill>
+            <a:srgbClr val="000000"/>
+          </a:solidFill>
+          <a:ln>
+            <a:noFill/>
+          </a:ln>
+          <a:effectLst/>
+        </p:spPr>
+        <p:style>
+          <a:lnRef idx="1">
+            <a:schemeClr val="accent1"/>
+          </a:lnRef>
+          <a:fillRef idx="3">
+            <a:schemeClr val="accent1"/>
+          </a:fillRef>
+          <a:effectRef idx="2">
+            <a:schemeClr val="accent1"/>
+          </a:effectRef>
+          <a:fontRef idx="minor">
+            <a:schemeClr val="lt1"/>
+          </a:fontRef>
+        </p:style>
+        <p:txBody>
+          <a:bodyPr rtlCol="0" anchor="ctr"/>
+          <a:lstStyle/>
+          <a:p>
+            <a:pPr algn="ctr"/>
+          </a:p>
+        </p:txBody>
+      </p:sp>
+      <p:sp>
+        <p:nvSpPr>
+          <p:cNvPr id="12" name="Rectangle 11"/>
+          <p:cNvSpPr/>
+          <p:nvPr/>
+        </p:nvSpPr>
+        <p:spPr>
+          <a:xfrm>
+            <a:off x="3349675" y="2423160"/>
+            <a:ext cx="237744" cy="237744"/>
+          </a:xfrm>
+          <a:prstGeom prst="rect">
+            <a:avLst/>
+          </a:prstGeom>
+          <a:solidFill>
+            <a:srgbClr val="FFFFFF"/>
+          </a:solidFill>
+          <a:ln w="38100">
+            <a:solidFill>
+              <a:srgbClr val="000000"/>
+            </a:solidFill>
+          </a:ln>
+          <a:effectLst/>
+        </p:spPr>
+        <p:style>
+          <a:lnRef idx="1">
+            <a:schemeClr val="accent1"/>
+          </a:lnRef>
+          <a:fillRef idx="3">
+            <a:schemeClr val="accent1"/>
+          </a:fillRef>
+          <a:effectRef idx="2">
+            <a:schemeClr val="accent1"/>
+          </a:effectRef>
+          <a:fontRef idx="minor">
+            <a:schemeClr val="lt1"/>
+          </a:fontRef>
+        </p:style>
+        <p:txBody>
+          <a:bodyPr rtlCol="0" anchor="ctr"/>
+          <a:lstStyle/>
+          <a:p>
+            <a:pPr algn="ctr"/>
+          </a:p>
+        </p:txBody>
+      </p:sp>
+      <p:sp>
+        <p:nvSpPr>
+          <p:cNvPr id="13" name="TextBox 12"/>
+          <p:cNvSpPr txBox="1"/>
+          <p:nvPr/>
+        </p:nvSpPr>
+        <p:spPr>
+          <a:xfrm>
+            <a:off x="3349675" y="2834640"/>
+            <a:ext cx="2563291" cy="365760"/>
           </a:xfrm>
           <a:prstGeom prst="rect">
             <a:avLst/>
@@ -6305,14 +5880,442 @@
                 </a:solidFill>
                 <a:latin typeface="IBM Plex Mono"/>
               </a:rPr>
-              <a:t>STATENS ØKONOMIFORVALTNING</a:t>
+              <a:t>Q2</a:t>
+            </a:r>
+          </a:p>
+        </p:txBody>
+      </p:sp>
+      <p:sp>
+        <p:nvSpPr>
+          <p:cNvPr id="14" name="TextBox 13"/>
+          <p:cNvSpPr txBox="1"/>
+          <p:nvPr/>
+        </p:nvSpPr>
+        <p:spPr>
+          <a:xfrm>
+            <a:off x="3349675" y="3200400"/>
+            <a:ext cx="2563291" cy="457200"/>
+          </a:xfrm>
+          <a:prstGeom prst="rect">
+            <a:avLst/>
+          </a:prstGeom>
+          <a:noFill/>
+        </p:spPr>
+        <p:txBody>
+          <a:bodyPr wrap="square">
+            <a:spAutoFit/>
+          </a:bodyPr>
+          <a:lstStyle/>
+          <a:p>
+            <a:pPr algn="l"/>
+            <a:r>
+              <a:rPr sz="1800" b="1">
+                <a:solidFill>
+                  <a:srgbClr val="000000"/>
+                </a:solidFill>
+                <a:latin typeface="IBM Plex Sans"/>
+              </a:rPr>
+              <a:t>Design</a:t>
+            </a:r>
+          </a:p>
+        </p:txBody>
+      </p:sp>
+      <p:sp>
+        <p:nvSpPr>
+          <p:cNvPr id="15" name="TextBox 14"/>
+          <p:cNvSpPr txBox="1"/>
+          <p:nvPr/>
+        </p:nvSpPr>
+        <p:spPr>
+          <a:xfrm>
+            <a:off x="3349675" y="3703320"/>
+            <a:ext cx="2517571" cy="1463040"/>
+          </a:xfrm>
+          <a:prstGeom prst="rect">
+            <a:avLst/>
+          </a:prstGeom>
+          <a:noFill/>
+        </p:spPr>
+        <p:txBody>
+          <a:bodyPr wrap="square">
+            <a:spAutoFit/>
+          </a:bodyPr>
+          <a:lstStyle/>
+          <a:p>
+            <a:pPr algn="l">
+              <a:lnSpc>
+                <a:spcPct val="125000"/>
+              </a:lnSpc>
+            </a:pPr>
+            <a:r>
+              <a:rPr sz="1400" b="0">
+                <a:solidFill>
+                  <a:srgbClr val="333333"/>
+                </a:solidFill>
+                <a:latin typeface="IBM Plex Sans"/>
+              </a:rPr>
+              <a:t>Løsninger formes.</a:t>
+            </a:r>
+          </a:p>
+        </p:txBody>
+      </p:sp>
+      <p:sp>
+        <p:nvSpPr>
+          <p:cNvPr id="16" name="Rectangle 15"/>
+          <p:cNvSpPr/>
+          <p:nvPr/>
+        </p:nvSpPr>
+        <p:spPr>
+          <a:xfrm>
+            <a:off x="6315302" y="2514600"/>
+            <a:ext cx="2526715" cy="38100"/>
+          </a:xfrm>
+          <a:prstGeom prst="rect">
+            <a:avLst/>
+          </a:prstGeom>
+          <a:solidFill>
+            <a:srgbClr val="000000"/>
+          </a:solidFill>
+          <a:ln>
+            <a:noFill/>
+          </a:ln>
+          <a:effectLst/>
+        </p:spPr>
+        <p:style>
+          <a:lnRef idx="1">
+            <a:schemeClr val="accent1"/>
+          </a:lnRef>
+          <a:fillRef idx="3">
+            <a:schemeClr val="accent1"/>
+          </a:fillRef>
+          <a:effectRef idx="2">
+            <a:schemeClr val="accent1"/>
+          </a:effectRef>
+          <a:fontRef idx="minor">
+            <a:schemeClr val="lt1"/>
+          </a:fontRef>
+        </p:style>
+        <p:txBody>
+          <a:bodyPr rtlCol="0" anchor="ctr"/>
+          <a:lstStyle/>
+          <a:p>
+            <a:pPr algn="ctr"/>
+          </a:p>
+        </p:txBody>
+      </p:sp>
+      <p:sp>
+        <p:nvSpPr>
+          <p:cNvPr id="17" name="Rectangle 16"/>
+          <p:cNvSpPr/>
+          <p:nvPr/>
+        </p:nvSpPr>
+        <p:spPr>
+          <a:xfrm>
+            <a:off x="6095846" y="2423160"/>
+            <a:ext cx="237744" cy="237744"/>
+          </a:xfrm>
+          <a:prstGeom prst="rect">
+            <a:avLst/>
+          </a:prstGeom>
+          <a:solidFill>
+            <a:srgbClr val="ED5E66"/>
+          </a:solidFill>
+          <a:ln w="38100">
+            <a:solidFill>
+              <a:srgbClr val="ED5E66"/>
+            </a:solidFill>
+          </a:ln>
+          <a:effectLst/>
+        </p:spPr>
+        <p:style>
+          <a:lnRef idx="1">
+            <a:schemeClr val="accent1"/>
+          </a:lnRef>
+          <a:fillRef idx="3">
+            <a:schemeClr val="accent1"/>
+          </a:fillRef>
+          <a:effectRef idx="2">
+            <a:schemeClr val="accent1"/>
+          </a:effectRef>
+          <a:fontRef idx="minor">
+            <a:schemeClr val="lt1"/>
+          </a:fontRef>
+        </p:style>
+        <p:txBody>
+          <a:bodyPr rtlCol="0" anchor="ctr"/>
+          <a:lstStyle/>
+          <a:p>
+            <a:pPr algn="ctr"/>
+          </a:p>
+        </p:txBody>
+      </p:sp>
+      <p:sp>
+        <p:nvSpPr>
+          <p:cNvPr id="18" name="TextBox 17"/>
+          <p:cNvSpPr txBox="1"/>
+          <p:nvPr/>
+        </p:nvSpPr>
+        <p:spPr>
+          <a:xfrm>
+            <a:off x="6095846" y="2834640"/>
+            <a:ext cx="2563291" cy="365760"/>
+          </a:xfrm>
+          <a:prstGeom prst="rect">
+            <a:avLst/>
+          </a:prstGeom>
+          <a:noFill/>
+        </p:spPr>
+        <p:txBody>
+          <a:bodyPr wrap="square">
+            <a:spAutoFit/>
+          </a:bodyPr>
+          <a:lstStyle/>
+          <a:p>
+            <a:pPr algn="l"/>
+            <a:r>
+              <a:rPr sz="1300" b="1" spc="120">
+                <a:solidFill>
+                  <a:srgbClr val="6B6B6B"/>
+                </a:solidFill>
+                <a:latin typeface="IBM Plex Mono"/>
+              </a:rPr>
+              <a:t>Q3</a:t>
+            </a:r>
+          </a:p>
+        </p:txBody>
+      </p:sp>
+      <p:sp>
+        <p:nvSpPr>
+          <p:cNvPr id="19" name="TextBox 18"/>
+          <p:cNvSpPr txBox="1"/>
+          <p:nvPr/>
+        </p:nvSpPr>
+        <p:spPr>
+          <a:xfrm>
+            <a:off x="6095846" y="3200400"/>
+            <a:ext cx="2563291" cy="457200"/>
+          </a:xfrm>
+          <a:prstGeom prst="rect">
+            <a:avLst/>
+          </a:prstGeom>
+          <a:noFill/>
+        </p:spPr>
+        <p:txBody>
+          <a:bodyPr wrap="square">
+            <a:spAutoFit/>
+          </a:bodyPr>
+          <a:lstStyle/>
+          <a:p>
+            <a:pPr algn="l"/>
+            <a:r>
+              <a:rPr sz="1800" b="1">
+                <a:solidFill>
+                  <a:srgbClr val="000000"/>
+                </a:solidFill>
+                <a:latin typeface="IBM Plex Sans"/>
+              </a:rPr>
+              <a:t>Udrulning</a:t>
+            </a:r>
+          </a:p>
+        </p:txBody>
+      </p:sp>
+      <p:sp>
+        <p:nvSpPr>
+          <p:cNvPr id="20" name="TextBox 19"/>
+          <p:cNvSpPr txBox="1"/>
+          <p:nvPr/>
+        </p:nvSpPr>
+        <p:spPr>
+          <a:xfrm>
+            <a:off x="6095846" y="3703320"/>
+            <a:ext cx="2517571" cy="1463040"/>
+          </a:xfrm>
+          <a:prstGeom prst="rect">
+            <a:avLst/>
+          </a:prstGeom>
+          <a:noFill/>
+        </p:spPr>
+        <p:txBody>
+          <a:bodyPr wrap="square">
+            <a:spAutoFit/>
+          </a:bodyPr>
+          <a:lstStyle/>
+          <a:p>
+            <a:pPr algn="l">
+              <a:lnSpc>
+                <a:spcPct val="125000"/>
+              </a:lnSpc>
+            </a:pPr>
+            <a:r>
+              <a:rPr sz="1400" b="0">
+                <a:solidFill>
+                  <a:srgbClr val="333333"/>
+                </a:solidFill>
+                <a:latin typeface="IBM Plex Sans"/>
+              </a:rPr>
+              <a:t>Vi er her nu.</a:t>
+            </a:r>
+          </a:p>
+        </p:txBody>
+      </p:sp>
+      <p:sp>
+        <p:nvSpPr>
+          <p:cNvPr id="21" name="Rectangle 20"/>
+          <p:cNvSpPr/>
+          <p:nvPr/>
+        </p:nvSpPr>
+        <p:spPr>
+          <a:xfrm>
+            <a:off x="8842017" y="2423160"/>
+            <a:ext cx="237744" cy="237744"/>
+          </a:xfrm>
+          <a:prstGeom prst="rect">
+            <a:avLst/>
+          </a:prstGeom>
+          <a:solidFill>
+            <a:srgbClr val="FFFFFF"/>
+          </a:solidFill>
+          <a:ln w="38100">
+            <a:solidFill>
+              <a:srgbClr val="000000"/>
+            </a:solidFill>
+          </a:ln>
+          <a:effectLst/>
+        </p:spPr>
+        <p:style>
+          <a:lnRef idx="1">
+            <a:schemeClr val="accent1"/>
+          </a:lnRef>
+          <a:fillRef idx="3">
+            <a:schemeClr val="accent1"/>
+          </a:fillRef>
+          <a:effectRef idx="2">
+            <a:schemeClr val="accent1"/>
+          </a:effectRef>
+          <a:fontRef idx="minor">
+            <a:schemeClr val="lt1"/>
+          </a:fontRef>
+        </p:style>
+        <p:txBody>
+          <a:bodyPr rtlCol="0" anchor="ctr"/>
+          <a:lstStyle/>
+          <a:p>
+            <a:pPr algn="ctr"/>
+          </a:p>
+        </p:txBody>
+      </p:sp>
+      <p:sp>
+        <p:nvSpPr>
+          <p:cNvPr id="22" name="TextBox 21"/>
+          <p:cNvSpPr txBox="1"/>
+          <p:nvPr/>
+        </p:nvSpPr>
+        <p:spPr>
+          <a:xfrm>
+            <a:off x="8842017" y="2834640"/>
+            <a:ext cx="2563291" cy="365760"/>
+          </a:xfrm>
+          <a:prstGeom prst="rect">
+            <a:avLst/>
+          </a:prstGeom>
+          <a:noFill/>
+        </p:spPr>
+        <p:txBody>
+          <a:bodyPr wrap="square">
+            <a:spAutoFit/>
+          </a:bodyPr>
+          <a:lstStyle/>
+          <a:p>
+            <a:pPr algn="l"/>
+            <a:r>
+              <a:rPr sz="1300" b="1" spc="120">
+                <a:solidFill>
+                  <a:srgbClr val="6B6B6B"/>
+                </a:solidFill>
+                <a:latin typeface="IBM Plex Mono"/>
+              </a:rPr>
+              <a:t>Q4</a:t>
+            </a:r>
+          </a:p>
+        </p:txBody>
+      </p:sp>
+      <p:sp>
+        <p:nvSpPr>
+          <p:cNvPr id="23" name="TextBox 22"/>
+          <p:cNvSpPr txBox="1"/>
+          <p:nvPr/>
+        </p:nvSpPr>
+        <p:spPr>
+          <a:xfrm>
+            <a:off x="8842017" y="3200400"/>
+            <a:ext cx="2563291" cy="457200"/>
+          </a:xfrm>
+          <a:prstGeom prst="rect">
+            <a:avLst/>
+          </a:prstGeom>
+          <a:noFill/>
+        </p:spPr>
+        <p:txBody>
+          <a:bodyPr wrap="square">
+            <a:spAutoFit/>
+          </a:bodyPr>
+          <a:lstStyle/>
+          <a:p>
+            <a:pPr algn="l"/>
+            <a:r>
+              <a:rPr sz="1800" b="1">
+                <a:solidFill>
+                  <a:srgbClr val="000000"/>
+                </a:solidFill>
+                <a:latin typeface="IBM Plex Sans"/>
+              </a:rPr>
+              <a:t>Evaluering</a:t>
+            </a:r>
+          </a:p>
+        </p:txBody>
+      </p:sp>
+      <p:sp>
+        <p:nvSpPr>
+          <p:cNvPr id="24" name="TextBox 23"/>
+          <p:cNvSpPr txBox="1"/>
+          <p:nvPr/>
+        </p:nvSpPr>
+        <p:spPr>
+          <a:xfrm>
+            <a:off x="8842017" y="3703320"/>
+            <a:ext cx="2517571" cy="1463040"/>
+          </a:xfrm>
+          <a:prstGeom prst="rect">
+            <a:avLst/>
+          </a:prstGeom>
+          <a:noFill/>
+        </p:spPr>
+        <p:txBody>
+          <a:bodyPr wrap="square">
+            <a:spAutoFit/>
+          </a:bodyPr>
+          <a:lstStyle/>
+          <a:p>
+            <a:pPr algn="l">
+              <a:lnSpc>
+                <a:spcPct val="125000"/>
+              </a:lnSpc>
+            </a:pPr>
+            <a:r>
+              <a:rPr sz="1400" b="0">
+                <a:solidFill>
+                  <a:srgbClr val="333333"/>
+                </a:solidFill>
+                <a:latin typeface="IBM Plex Sans"/>
+              </a:rPr>
+              <a:t>Læring og justering.</a:t>
             </a:r>
           </a:p>
         </p:txBody>
       </p:sp>
       <p:pic>
         <p:nvPicPr>
-          <p:cNvPr id="9" name="Picture 8" descr="oes-logo-green.png"/>
+          <p:cNvPr id="25" name="Picture 24" descr="oes-logo-green.png"/>
           <p:cNvPicPr>
             <a:picLocks noChangeAspect="1"/>
           </p:cNvPicPr>
@@ -6343,6 +6346,2168 @@
 </file>
 
 <file path=ppt/slides/slide15.xml><?xml version="1.0" encoding="utf-8"?>
+<p:sld xmlns:a="http://schemas.openxmlformats.org/drawingml/2006/main" xmlns:p="http://schemas.openxmlformats.org/presentationml/2006/main" xmlns:r="http://schemas.openxmlformats.org/officeDocument/2006/relationships">
+  <p:cSld>
+    <p:spTree>
+      <p:nvGrpSpPr>
+        <p:cNvPr id="1" name=""/>
+        <p:cNvGrpSpPr/>
+        <p:nvPr/>
+      </p:nvGrpSpPr>
+      <p:grpSpPr/>
+      <p:sp>
+        <p:nvSpPr>
+          <p:cNvPr id="2" name="Rectangle 1"/>
+          <p:cNvSpPr/>
+          <p:nvPr/>
+        </p:nvSpPr>
+        <p:spPr>
+          <a:xfrm>
+            <a:off x="0" y="0"/>
+            <a:ext cx="12191695" cy="6858000"/>
+          </a:xfrm>
+          <a:prstGeom prst="rect">
+            <a:avLst/>
+          </a:prstGeom>
+          <a:solidFill>
+            <a:srgbClr val="F4F4F2"/>
+          </a:solidFill>
+          <a:ln>
+            <a:noFill/>
+          </a:ln>
+          <a:effectLst/>
+        </p:spPr>
+        <p:style>
+          <a:lnRef idx="1">
+            <a:schemeClr val="accent1"/>
+          </a:lnRef>
+          <a:fillRef idx="3">
+            <a:schemeClr val="accent1"/>
+          </a:fillRef>
+          <a:effectRef idx="2">
+            <a:schemeClr val="accent1"/>
+          </a:effectRef>
+          <a:fontRef idx="minor">
+            <a:schemeClr val="lt1"/>
+          </a:fontRef>
+        </p:style>
+        <p:txBody>
+          <a:bodyPr rtlCol="0" anchor="ctr"/>
+          <a:lstStyle/>
+          <a:p>
+            <a:pPr algn="ctr"/>
+          </a:p>
+        </p:txBody>
+      </p:sp>
+      <p:sp>
+        <p:nvSpPr>
+          <p:cNvPr id="3" name="Rectangle 2"/>
+          <p:cNvSpPr/>
+          <p:nvPr/>
+        </p:nvSpPr>
+        <p:spPr>
+          <a:xfrm>
+            <a:off x="0" y="0"/>
+            <a:ext cx="12191695" cy="6858000"/>
+          </a:xfrm>
+          <a:prstGeom prst="rect">
+            <a:avLst/>
+          </a:prstGeom>
+          <a:noFill/>
+          <a:ln w="38100">
+            <a:solidFill>
+              <a:srgbClr val="000000"/>
+            </a:solidFill>
+          </a:ln>
+          <a:effectLst/>
+        </p:spPr>
+        <p:style>
+          <a:lnRef idx="1">
+            <a:schemeClr val="accent1"/>
+          </a:lnRef>
+          <a:fillRef idx="3">
+            <a:schemeClr val="accent1"/>
+          </a:fillRef>
+          <a:effectRef idx="2">
+            <a:schemeClr val="accent1"/>
+          </a:effectRef>
+          <a:fontRef idx="minor">
+            <a:schemeClr val="lt1"/>
+          </a:fontRef>
+        </p:style>
+        <p:txBody>
+          <a:bodyPr rtlCol="0" anchor="ctr"/>
+          <a:lstStyle/>
+          <a:p>
+            <a:pPr algn="ctr"/>
+          </a:p>
+        </p:txBody>
+      </p:sp>
+      <p:sp>
+        <p:nvSpPr>
+          <p:cNvPr id="4" name="TextBox 3"/>
+          <p:cNvSpPr txBox="1"/>
+          <p:nvPr/>
+        </p:nvSpPr>
+        <p:spPr>
+          <a:xfrm>
+            <a:off x="603504" y="457200"/>
+            <a:ext cx="10984687" cy="731520"/>
+          </a:xfrm>
+          <a:prstGeom prst="rect">
+            <a:avLst/>
+          </a:prstGeom>
+          <a:noFill/>
+        </p:spPr>
+        <p:txBody>
+          <a:bodyPr wrap="square">
+            <a:spAutoFit/>
+          </a:bodyPr>
+          <a:lstStyle/>
+          <a:p>
+            <a:pPr algn="l">
+              <a:lnSpc>
+                <a:spcPct val="105000"/>
+              </a:lnSpc>
+            </a:pPr>
+            <a:r>
+              <a:rPr sz="4200" b="1">
+                <a:solidFill>
+                  <a:srgbClr val="000000"/>
+                </a:solidFill>
+                <a:latin typeface="IBM Plex Sans"/>
+              </a:rPr>
+              <a:t>Før vs. efter</a:t>
+            </a:r>
+          </a:p>
+        </p:txBody>
+      </p:sp>
+      <p:sp>
+        <p:nvSpPr>
+          <p:cNvPr id="5" name="Rectangle 4"/>
+          <p:cNvSpPr/>
+          <p:nvPr/>
+        </p:nvSpPr>
+        <p:spPr>
+          <a:xfrm>
+            <a:off x="694944" y="1044244"/>
+            <a:ext cx="640080" cy="76200"/>
+          </a:xfrm>
+          <a:prstGeom prst="rect">
+            <a:avLst/>
+          </a:prstGeom>
+          <a:solidFill>
+            <a:srgbClr val="066B43"/>
+          </a:solidFill>
+          <a:ln>
+            <a:noFill/>
+          </a:ln>
+          <a:effectLst/>
+        </p:spPr>
+        <p:style>
+          <a:lnRef idx="1">
+            <a:schemeClr val="accent1"/>
+          </a:lnRef>
+          <a:fillRef idx="3">
+            <a:schemeClr val="accent1"/>
+          </a:fillRef>
+          <a:effectRef idx="2">
+            <a:schemeClr val="accent1"/>
+          </a:effectRef>
+          <a:fontRef idx="minor">
+            <a:schemeClr val="lt1"/>
+          </a:fontRef>
+        </p:style>
+        <p:txBody>
+          <a:bodyPr rtlCol="0" anchor="ctr"/>
+          <a:lstStyle/>
+          <a:p>
+            <a:pPr algn="ctr"/>
+          </a:p>
+        </p:txBody>
+      </p:sp>
+      <p:sp>
+        <p:nvSpPr>
+          <p:cNvPr id="6" name="Rectangle 5"/>
+          <p:cNvSpPr/>
+          <p:nvPr/>
+        </p:nvSpPr>
+        <p:spPr>
+          <a:xfrm>
+            <a:off x="603504" y="1965960"/>
+            <a:ext cx="5303520" cy="3657600"/>
+          </a:xfrm>
+          <a:prstGeom prst="rect">
+            <a:avLst/>
+          </a:prstGeom>
+          <a:solidFill>
+            <a:srgbClr val="FFFFFF"/>
+          </a:solidFill>
+          <a:ln w="25400">
+            <a:solidFill>
+              <a:srgbClr val="000000"/>
+            </a:solidFill>
+          </a:ln>
+          <a:effectLst/>
+        </p:spPr>
+        <p:style>
+          <a:lnRef idx="1">
+            <a:schemeClr val="accent1"/>
+          </a:lnRef>
+          <a:fillRef idx="3">
+            <a:schemeClr val="accent1"/>
+          </a:fillRef>
+          <a:effectRef idx="2">
+            <a:schemeClr val="accent1"/>
+          </a:effectRef>
+          <a:fontRef idx="minor">
+            <a:schemeClr val="lt1"/>
+          </a:fontRef>
+        </p:style>
+        <p:txBody>
+          <a:bodyPr rtlCol="0" anchor="ctr"/>
+          <a:lstStyle/>
+          <a:p>
+            <a:pPr algn="ctr"/>
+          </a:p>
+        </p:txBody>
+      </p:sp>
+      <p:sp>
+        <p:nvSpPr>
+          <p:cNvPr id="7" name="TextBox 6"/>
+          <p:cNvSpPr txBox="1"/>
+          <p:nvPr/>
+        </p:nvSpPr>
+        <p:spPr>
+          <a:xfrm>
+            <a:off x="877824" y="2194560"/>
+            <a:ext cx="4754880" cy="457200"/>
+          </a:xfrm>
+          <a:prstGeom prst="rect">
+            <a:avLst/>
+          </a:prstGeom>
+          <a:noFill/>
+        </p:spPr>
+        <p:txBody>
+          <a:bodyPr wrap="square">
+            <a:spAutoFit/>
+          </a:bodyPr>
+          <a:lstStyle/>
+          <a:p>
+            <a:pPr algn="l"/>
+            <a:r>
+              <a:rPr sz="1400" b="1" spc="120">
+                <a:solidFill>
+                  <a:srgbClr val="000000"/>
+                </a:solidFill>
+                <a:latin typeface="IBM Plex Mono"/>
+              </a:rPr>
+              <a:t>I DAG</a:t>
+            </a:r>
+          </a:p>
+        </p:txBody>
+      </p:sp>
+      <p:sp>
+        <p:nvSpPr>
+          <p:cNvPr id="8" name="Rectangle 7"/>
+          <p:cNvSpPr/>
+          <p:nvPr/>
+        </p:nvSpPr>
+        <p:spPr>
+          <a:xfrm>
+            <a:off x="877824" y="2918460"/>
+            <a:ext cx="201168" cy="201168"/>
+          </a:xfrm>
+          <a:prstGeom prst="rect">
+            <a:avLst/>
+          </a:prstGeom>
+          <a:solidFill>
+            <a:srgbClr val="ED5E66"/>
+          </a:solidFill>
+          <a:ln>
+            <a:noFill/>
+          </a:ln>
+          <a:effectLst/>
+        </p:spPr>
+        <p:style>
+          <a:lnRef idx="1">
+            <a:schemeClr val="accent1"/>
+          </a:lnRef>
+          <a:fillRef idx="3">
+            <a:schemeClr val="accent1"/>
+          </a:fillRef>
+          <a:effectRef idx="2">
+            <a:schemeClr val="accent1"/>
+          </a:effectRef>
+          <a:fontRef idx="minor">
+            <a:schemeClr val="lt1"/>
+          </a:fontRef>
+        </p:style>
+        <p:txBody>
+          <a:bodyPr rtlCol="0" anchor="ctr"/>
+          <a:lstStyle/>
+          <a:p>
+            <a:pPr algn="ctr"/>
+          </a:p>
+        </p:txBody>
+      </p:sp>
+      <p:sp>
+        <p:nvSpPr>
+          <p:cNvPr id="9" name="TextBox 8"/>
+          <p:cNvSpPr txBox="1"/>
+          <p:nvPr/>
+        </p:nvSpPr>
+        <p:spPr>
+          <a:xfrm>
+            <a:off x="1243584" y="2880360"/>
+            <a:ext cx="4389120" cy="457200"/>
+          </a:xfrm>
+          <a:prstGeom prst="rect">
+            <a:avLst/>
+          </a:prstGeom>
+          <a:noFill/>
+        </p:spPr>
+        <p:txBody>
+          <a:bodyPr wrap="square">
+            <a:spAutoFit/>
+          </a:bodyPr>
+          <a:lstStyle/>
+          <a:p>
+            <a:pPr algn="l"/>
+            <a:r>
+              <a:rPr sz="1700" b="0">
+                <a:solidFill>
+                  <a:srgbClr val="333333"/>
+                </a:solidFill>
+                <a:latin typeface="IBM Plex Sans"/>
+              </a:rPr>
+              <a:t>Manuelle indberetninger</a:t>
+            </a:r>
+          </a:p>
+        </p:txBody>
+      </p:sp>
+      <p:sp>
+        <p:nvSpPr>
+          <p:cNvPr id="10" name="Rectangle 9"/>
+          <p:cNvSpPr/>
+          <p:nvPr/>
+        </p:nvSpPr>
+        <p:spPr>
+          <a:xfrm>
+            <a:off x="877824" y="3467100"/>
+            <a:ext cx="201168" cy="201168"/>
+          </a:xfrm>
+          <a:prstGeom prst="rect">
+            <a:avLst/>
+          </a:prstGeom>
+          <a:solidFill>
+            <a:srgbClr val="ED5E66"/>
+          </a:solidFill>
+          <a:ln>
+            <a:noFill/>
+          </a:ln>
+          <a:effectLst/>
+        </p:spPr>
+        <p:style>
+          <a:lnRef idx="1">
+            <a:schemeClr val="accent1"/>
+          </a:lnRef>
+          <a:fillRef idx="3">
+            <a:schemeClr val="accent1"/>
+          </a:fillRef>
+          <a:effectRef idx="2">
+            <a:schemeClr val="accent1"/>
+          </a:effectRef>
+          <a:fontRef idx="minor">
+            <a:schemeClr val="lt1"/>
+          </a:fontRef>
+        </p:style>
+        <p:txBody>
+          <a:bodyPr rtlCol="0" anchor="ctr"/>
+          <a:lstStyle/>
+          <a:p>
+            <a:pPr algn="ctr"/>
+          </a:p>
+        </p:txBody>
+      </p:sp>
+      <p:sp>
+        <p:nvSpPr>
+          <p:cNvPr id="11" name="TextBox 10"/>
+          <p:cNvSpPr txBox="1"/>
+          <p:nvPr/>
+        </p:nvSpPr>
+        <p:spPr>
+          <a:xfrm>
+            <a:off x="1243584" y="3429000"/>
+            <a:ext cx="4389120" cy="457200"/>
+          </a:xfrm>
+          <a:prstGeom prst="rect">
+            <a:avLst/>
+          </a:prstGeom>
+          <a:noFill/>
+        </p:spPr>
+        <p:txBody>
+          <a:bodyPr wrap="square">
+            <a:spAutoFit/>
+          </a:bodyPr>
+          <a:lstStyle/>
+          <a:p>
+            <a:pPr algn="l"/>
+            <a:r>
+              <a:rPr sz="1700" b="0">
+                <a:solidFill>
+                  <a:srgbClr val="333333"/>
+                </a:solidFill>
+                <a:latin typeface="IBM Plex Sans"/>
+              </a:rPr>
+              <a:t>Spredte systemer</a:t>
+            </a:r>
+          </a:p>
+        </p:txBody>
+      </p:sp>
+      <p:sp>
+        <p:nvSpPr>
+          <p:cNvPr id="12" name="Rectangle 11"/>
+          <p:cNvSpPr/>
+          <p:nvPr/>
+        </p:nvSpPr>
+        <p:spPr>
+          <a:xfrm>
+            <a:off x="877824" y="4015740"/>
+            <a:ext cx="201168" cy="201168"/>
+          </a:xfrm>
+          <a:prstGeom prst="rect">
+            <a:avLst/>
+          </a:prstGeom>
+          <a:solidFill>
+            <a:srgbClr val="066B43"/>
+          </a:solidFill>
+          <a:ln>
+            <a:noFill/>
+          </a:ln>
+          <a:effectLst/>
+        </p:spPr>
+        <p:style>
+          <a:lnRef idx="1">
+            <a:schemeClr val="accent1"/>
+          </a:lnRef>
+          <a:fillRef idx="3">
+            <a:schemeClr val="accent1"/>
+          </a:fillRef>
+          <a:effectRef idx="2">
+            <a:schemeClr val="accent1"/>
+          </a:effectRef>
+          <a:fontRef idx="minor">
+            <a:schemeClr val="lt1"/>
+          </a:fontRef>
+        </p:style>
+        <p:txBody>
+          <a:bodyPr rtlCol="0" anchor="ctr"/>
+          <a:lstStyle/>
+          <a:p>
+            <a:pPr algn="ctr"/>
+          </a:p>
+        </p:txBody>
+      </p:sp>
+      <p:sp>
+        <p:nvSpPr>
+          <p:cNvPr id="13" name="TextBox 12"/>
+          <p:cNvSpPr txBox="1"/>
+          <p:nvPr/>
+        </p:nvSpPr>
+        <p:spPr>
+          <a:xfrm>
+            <a:off x="1243584" y="3977640"/>
+            <a:ext cx="4389120" cy="457200"/>
+          </a:xfrm>
+          <a:prstGeom prst="rect">
+            <a:avLst/>
+          </a:prstGeom>
+          <a:noFill/>
+        </p:spPr>
+        <p:txBody>
+          <a:bodyPr wrap="square">
+            <a:spAutoFit/>
+          </a:bodyPr>
+          <a:lstStyle/>
+          <a:p>
+            <a:pPr algn="l"/>
+            <a:r>
+              <a:rPr sz="1700" b="0">
+                <a:solidFill>
+                  <a:srgbClr val="333333"/>
+                </a:solidFill>
+                <a:latin typeface="IBM Plex Sans"/>
+              </a:rPr>
+              <a:t>Kendt af brugerne</a:t>
+            </a:r>
+          </a:p>
+        </p:txBody>
+      </p:sp>
+      <p:sp>
+        <p:nvSpPr>
+          <p:cNvPr id="14" name="Rectangle 13"/>
+          <p:cNvSpPr/>
+          <p:nvPr/>
+        </p:nvSpPr>
+        <p:spPr>
+          <a:xfrm>
+            <a:off x="6272784" y="1965960"/>
+            <a:ext cx="5303520" cy="3657600"/>
+          </a:xfrm>
+          <a:prstGeom prst="rect">
+            <a:avLst/>
+          </a:prstGeom>
+          <a:solidFill>
+            <a:srgbClr val="FFFFFF"/>
+          </a:solidFill>
+          <a:ln w="25400">
+            <a:solidFill>
+              <a:srgbClr val="000000"/>
+            </a:solidFill>
+          </a:ln>
+          <a:effectLst>
+            <a:outerShdw blurRad="0" dist="63500" dir="2700000" rotWithShape="0">
+              <a:srgbClr val="ED5E66"/>
+            </a:outerShdw>
+          </a:effectLst>
+        </p:spPr>
+        <p:style>
+          <a:lnRef idx="1">
+            <a:schemeClr val="accent1"/>
+          </a:lnRef>
+          <a:fillRef idx="3">
+            <a:schemeClr val="accent1"/>
+          </a:fillRef>
+          <a:effectRef idx="2">
+            <a:schemeClr val="accent1"/>
+          </a:effectRef>
+          <a:fontRef idx="minor">
+            <a:schemeClr val="lt1"/>
+          </a:fontRef>
+        </p:style>
+        <p:txBody>
+          <a:bodyPr rtlCol="0" anchor="ctr"/>
+          <a:lstStyle/>
+          <a:p>
+            <a:pPr algn="ctr"/>
+          </a:p>
+        </p:txBody>
+      </p:sp>
+      <p:sp>
+        <p:nvSpPr>
+          <p:cNvPr id="15" name="TextBox 14"/>
+          <p:cNvSpPr txBox="1"/>
+          <p:nvPr/>
+        </p:nvSpPr>
+        <p:spPr>
+          <a:xfrm>
+            <a:off x="6547104" y="2194560"/>
+            <a:ext cx="4754880" cy="457200"/>
+          </a:xfrm>
+          <a:prstGeom prst="rect">
+            <a:avLst/>
+          </a:prstGeom>
+          <a:noFill/>
+        </p:spPr>
+        <p:txBody>
+          <a:bodyPr wrap="square">
+            <a:spAutoFit/>
+          </a:bodyPr>
+          <a:lstStyle/>
+          <a:p>
+            <a:pPr algn="l"/>
+            <a:r>
+              <a:rPr sz="1400" b="1" spc="120">
+                <a:solidFill>
+                  <a:srgbClr val="000000"/>
+                </a:solidFill>
+                <a:latin typeface="IBM Plex Mono"/>
+              </a:rPr>
+              <a:t>EFTER</a:t>
+            </a:r>
+          </a:p>
+        </p:txBody>
+      </p:sp>
+      <p:sp>
+        <p:nvSpPr>
+          <p:cNvPr id="16" name="Rectangle 15"/>
+          <p:cNvSpPr/>
+          <p:nvPr/>
+        </p:nvSpPr>
+        <p:spPr>
+          <a:xfrm>
+            <a:off x="6547104" y="2918460"/>
+            <a:ext cx="201168" cy="201168"/>
+          </a:xfrm>
+          <a:prstGeom prst="rect">
+            <a:avLst/>
+          </a:prstGeom>
+          <a:solidFill>
+            <a:srgbClr val="066B43"/>
+          </a:solidFill>
+          <a:ln>
+            <a:noFill/>
+          </a:ln>
+          <a:effectLst/>
+        </p:spPr>
+        <p:style>
+          <a:lnRef idx="1">
+            <a:schemeClr val="accent1"/>
+          </a:lnRef>
+          <a:fillRef idx="3">
+            <a:schemeClr val="accent1"/>
+          </a:fillRef>
+          <a:effectRef idx="2">
+            <a:schemeClr val="accent1"/>
+          </a:effectRef>
+          <a:fontRef idx="minor">
+            <a:schemeClr val="lt1"/>
+          </a:fontRef>
+        </p:style>
+        <p:txBody>
+          <a:bodyPr rtlCol="0" anchor="ctr"/>
+          <a:lstStyle/>
+          <a:p>
+            <a:pPr algn="ctr"/>
+          </a:p>
+        </p:txBody>
+      </p:sp>
+      <p:sp>
+        <p:nvSpPr>
+          <p:cNvPr id="17" name="TextBox 16"/>
+          <p:cNvSpPr txBox="1"/>
+          <p:nvPr/>
+        </p:nvSpPr>
+        <p:spPr>
+          <a:xfrm>
+            <a:off x="6912864" y="2880360"/>
+            <a:ext cx="4389120" cy="457200"/>
+          </a:xfrm>
+          <a:prstGeom prst="rect">
+            <a:avLst/>
+          </a:prstGeom>
+          <a:noFill/>
+        </p:spPr>
+        <p:txBody>
+          <a:bodyPr wrap="square">
+            <a:spAutoFit/>
+          </a:bodyPr>
+          <a:lstStyle/>
+          <a:p>
+            <a:pPr algn="l"/>
+            <a:r>
+              <a:rPr sz="1700" b="0">
+                <a:solidFill>
+                  <a:srgbClr val="333333"/>
+                </a:solidFill>
+                <a:latin typeface="IBM Plex Sans"/>
+              </a:rPr>
+              <a:t>Automatiske flows</a:t>
+            </a:r>
+          </a:p>
+        </p:txBody>
+      </p:sp>
+      <p:sp>
+        <p:nvSpPr>
+          <p:cNvPr id="18" name="Rectangle 17"/>
+          <p:cNvSpPr/>
+          <p:nvPr/>
+        </p:nvSpPr>
+        <p:spPr>
+          <a:xfrm>
+            <a:off x="6547104" y="3467100"/>
+            <a:ext cx="201168" cy="201168"/>
+          </a:xfrm>
+          <a:prstGeom prst="rect">
+            <a:avLst/>
+          </a:prstGeom>
+          <a:solidFill>
+            <a:srgbClr val="066B43"/>
+          </a:solidFill>
+          <a:ln>
+            <a:noFill/>
+          </a:ln>
+          <a:effectLst/>
+        </p:spPr>
+        <p:style>
+          <a:lnRef idx="1">
+            <a:schemeClr val="accent1"/>
+          </a:lnRef>
+          <a:fillRef idx="3">
+            <a:schemeClr val="accent1"/>
+          </a:fillRef>
+          <a:effectRef idx="2">
+            <a:schemeClr val="accent1"/>
+          </a:effectRef>
+          <a:fontRef idx="minor">
+            <a:schemeClr val="lt1"/>
+          </a:fontRef>
+        </p:style>
+        <p:txBody>
+          <a:bodyPr rtlCol="0" anchor="ctr"/>
+          <a:lstStyle/>
+          <a:p>
+            <a:pPr algn="ctr"/>
+          </a:p>
+        </p:txBody>
+      </p:sp>
+      <p:sp>
+        <p:nvSpPr>
+          <p:cNvPr id="19" name="TextBox 18"/>
+          <p:cNvSpPr txBox="1"/>
+          <p:nvPr/>
+        </p:nvSpPr>
+        <p:spPr>
+          <a:xfrm>
+            <a:off x="6912864" y="3429000"/>
+            <a:ext cx="4389120" cy="457200"/>
+          </a:xfrm>
+          <a:prstGeom prst="rect">
+            <a:avLst/>
+          </a:prstGeom>
+          <a:noFill/>
+        </p:spPr>
+        <p:txBody>
+          <a:bodyPr wrap="square">
+            <a:spAutoFit/>
+          </a:bodyPr>
+          <a:lstStyle/>
+          <a:p>
+            <a:pPr algn="l"/>
+            <a:r>
+              <a:rPr sz="1700" b="0">
+                <a:solidFill>
+                  <a:srgbClr val="333333"/>
+                </a:solidFill>
+                <a:latin typeface="IBM Plex Sans"/>
+              </a:rPr>
+              <a:t>Samlet platform</a:t>
+            </a:r>
+          </a:p>
+        </p:txBody>
+      </p:sp>
+      <p:sp>
+        <p:nvSpPr>
+          <p:cNvPr id="20" name="Rectangle 19"/>
+          <p:cNvSpPr/>
+          <p:nvPr/>
+        </p:nvSpPr>
+        <p:spPr>
+          <a:xfrm>
+            <a:off x="6547104" y="4015740"/>
+            <a:ext cx="201168" cy="201168"/>
+          </a:xfrm>
+          <a:prstGeom prst="rect">
+            <a:avLst/>
+          </a:prstGeom>
+          <a:solidFill>
+            <a:srgbClr val="066B43"/>
+          </a:solidFill>
+          <a:ln>
+            <a:noFill/>
+          </a:ln>
+          <a:effectLst/>
+        </p:spPr>
+        <p:style>
+          <a:lnRef idx="1">
+            <a:schemeClr val="accent1"/>
+          </a:lnRef>
+          <a:fillRef idx="3">
+            <a:schemeClr val="accent1"/>
+          </a:fillRef>
+          <a:effectRef idx="2">
+            <a:schemeClr val="accent1"/>
+          </a:effectRef>
+          <a:fontRef idx="minor">
+            <a:schemeClr val="lt1"/>
+          </a:fontRef>
+        </p:style>
+        <p:txBody>
+          <a:bodyPr rtlCol="0" anchor="ctr"/>
+          <a:lstStyle/>
+          <a:p>
+            <a:pPr algn="ctr"/>
+          </a:p>
+        </p:txBody>
+      </p:sp>
+      <p:sp>
+        <p:nvSpPr>
+          <p:cNvPr id="21" name="TextBox 20"/>
+          <p:cNvSpPr txBox="1"/>
+          <p:nvPr/>
+        </p:nvSpPr>
+        <p:spPr>
+          <a:xfrm>
+            <a:off x="6912864" y="3977640"/>
+            <a:ext cx="4389120" cy="457200"/>
+          </a:xfrm>
+          <a:prstGeom prst="rect">
+            <a:avLst/>
+          </a:prstGeom>
+          <a:noFill/>
+        </p:spPr>
+        <p:txBody>
+          <a:bodyPr wrap="square">
+            <a:spAutoFit/>
+          </a:bodyPr>
+          <a:lstStyle/>
+          <a:p>
+            <a:pPr algn="l"/>
+            <a:r>
+              <a:rPr sz="1700" b="0">
+                <a:solidFill>
+                  <a:srgbClr val="333333"/>
+                </a:solidFill>
+                <a:latin typeface="IBM Plex Sans"/>
+              </a:rPr>
+              <a:t>Realtids-overblik</a:t>
+            </a:r>
+          </a:p>
+        </p:txBody>
+      </p:sp>
+      <p:pic>
+        <p:nvPicPr>
+          <p:cNvPr id="22" name="Picture 21" descr="oes-logo-green.png"/>
+          <p:cNvPicPr>
+            <a:picLocks noChangeAspect="1"/>
+          </p:cNvPicPr>
+          <p:nvPr/>
+        </p:nvPicPr>
+        <p:blipFill>
+          <a:blip r:embed="rId2"/>
+          <a:stretch>
+            <a:fillRect/>
+          </a:stretch>
+        </p:blipFill>
+        <p:spPr>
+          <a:xfrm>
+            <a:off x="10518343" y="6215427"/>
+            <a:ext cx="1417320" cy="386541"/>
+          </a:xfrm>
+          <a:prstGeom prst="rect">
+            <a:avLst/>
+          </a:prstGeom>
+        </p:spPr>
+      </p:pic>
+    </p:spTree>
+  </p:cSld>
+  <p:clrMapOvr>
+    <a:masterClrMapping/>
+  </p:clrMapOvr>
+</p:sld>
+</file>
+
+<file path=ppt/slides/slide16.xml><?xml version="1.0" encoding="utf-8"?>
+<p:sld xmlns:a="http://schemas.openxmlformats.org/drawingml/2006/main" xmlns:p="http://schemas.openxmlformats.org/presentationml/2006/main" xmlns:r="http://schemas.openxmlformats.org/officeDocument/2006/relationships">
+  <p:cSld>
+    <p:spTree>
+      <p:nvGrpSpPr>
+        <p:cNvPr id="1" name=""/>
+        <p:cNvGrpSpPr/>
+        <p:nvPr/>
+      </p:nvGrpSpPr>
+      <p:grpSpPr/>
+      <p:sp>
+        <p:nvSpPr>
+          <p:cNvPr id="2" name="Rectangle 1"/>
+          <p:cNvSpPr/>
+          <p:nvPr/>
+        </p:nvSpPr>
+        <p:spPr>
+          <a:xfrm>
+            <a:off x="0" y="0"/>
+            <a:ext cx="12191695" cy="6858000"/>
+          </a:xfrm>
+          <a:prstGeom prst="rect">
+            <a:avLst/>
+          </a:prstGeom>
+          <a:solidFill>
+            <a:srgbClr val="F4F4F2"/>
+          </a:solidFill>
+          <a:ln>
+            <a:noFill/>
+          </a:ln>
+          <a:effectLst/>
+        </p:spPr>
+        <p:style>
+          <a:lnRef idx="1">
+            <a:schemeClr val="accent1"/>
+          </a:lnRef>
+          <a:fillRef idx="3">
+            <a:schemeClr val="accent1"/>
+          </a:fillRef>
+          <a:effectRef idx="2">
+            <a:schemeClr val="accent1"/>
+          </a:effectRef>
+          <a:fontRef idx="minor">
+            <a:schemeClr val="lt1"/>
+          </a:fontRef>
+        </p:style>
+        <p:txBody>
+          <a:bodyPr rtlCol="0" anchor="ctr"/>
+          <a:lstStyle/>
+          <a:p>
+            <a:pPr algn="ctr"/>
+          </a:p>
+        </p:txBody>
+      </p:sp>
+      <p:sp>
+        <p:nvSpPr>
+          <p:cNvPr id="3" name="Rectangle 2"/>
+          <p:cNvSpPr/>
+          <p:nvPr/>
+        </p:nvSpPr>
+        <p:spPr>
+          <a:xfrm>
+            <a:off x="0" y="0"/>
+            <a:ext cx="12191695" cy="6858000"/>
+          </a:xfrm>
+          <a:prstGeom prst="rect">
+            <a:avLst/>
+          </a:prstGeom>
+          <a:noFill/>
+          <a:ln w="38100">
+            <a:solidFill>
+              <a:srgbClr val="000000"/>
+            </a:solidFill>
+          </a:ln>
+          <a:effectLst/>
+        </p:spPr>
+        <p:style>
+          <a:lnRef idx="1">
+            <a:schemeClr val="accent1"/>
+          </a:lnRef>
+          <a:fillRef idx="3">
+            <a:schemeClr val="accent1"/>
+          </a:fillRef>
+          <a:effectRef idx="2">
+            <a:schemeClr val="accent1"/>
+          </a:effectRef>
+          <a:fontRef idx="minor">
+            <a:schemeClr val="lt1"/>
+          </a:fontRef>
+        </p:style>
+        <p:txBody>
+          <a:bodyPr rtlCol="0" anchor="ctr"/>
+          <a:lstStyle/>
+          <a:p>
+            <a:pPr algn="ctr"/>
+          </a:p>
+        </p:txBody>
+      </p:sp>
+      <p:sp>
+        <p:nvSpPr>
+          <p:cNvPr id="4" name="TextBox 3"/>
+          <p:cNvSpPr txBox="1"/>
+          <p:nvPr/>
+        </p:nvSpPr>
+        <p:spPr>
+          <a:xfrm>
+            <a:off x="603504" y="1554480"/>
+            <a:ext cx="10984687" cy="2560320"/>
+          </a:xfrm>
+          <a:prstGeom prst="rect">
+            <a:avLst/>
+          </a:prstGeom>
+          <a:noFill/>
+        </p:spPr>
+        <p:txBody>
+          <a:bodyPr wrap="none">
+            <a:normAutofit/>
+          </a:bodyPr>
+          <a:lstStyle/>
+          <a:p>
+            <a:pPr algn="l">
+              <a:lnSpc>
+                <a:spcPct val="90000"/>
+              </a:lnSpc>
+            </a:pPr>
+            <a:r>
+              <a:rPr sz="15000" b="1">
+                <a:solidFill>
+                  <a:srgbClr val="066B43"/>
+                </a:solidFill>
+                <a:latin typeface="IBM Plex Mono"/>
+              </a:rPr>
+              <a:t>+18%</a:t>
+            </a:r>
+          </a:p>
+        </p:txBody>
+      </p:sp>
+      <p:sp>
+        <p:nvSpPr>
+          <p:cNvPr id="5" name="TextBox 4"/>
+          <p:cNvSpPr txBox="1"/>
+          <p:nvPr/>
+        </p:nvSpPr>
+        <p:spPr>
+          <a:xfrm>
+            <a:off x="603504" y="4389120"/>
+            <a:ext cx="8229600" cy="914400"/>
+          </a:xfrm>
+          <a:prstGeom prst="rect">
+            <a:avLst/>
+          </a:prstGeom>
+          <a:noFill/>
+        </p:spPr>
+        <p:txBody>
+          <a:bodyPr wrap="square">
+            <a:spAutoFit/>
+          </a:bodyPr>
+          <a:lstStyle/>
+          <a:p>
+            <a:pPr algn="l">
+              <a:lnSpc>
+                <a:spcPct val="120000"/>
+              </a:lnSpc>
+            </a:pPr>
+            <a:r>
+              <a:rPr sz="2400" b="0">
+                <a:solidFill>
+                  <a:srgbClr val="333333"/>
+                </a:solidFill>
+                <a:latin typeface="IBM Plex Sans"/>
+              </a:rPr>
+              <a:t>Effektivisering år over år — positivt tal bærer ØS-grøn.</a:t>
+            </a:r>
+          </a:p>
+        </p:txBody>
+      </p:sp>
+      <p:sp>
+        <p:nvSpPr>
+          <p:cNvPr id="6" name="TextBox 5"/>
+          <p:cNvSpPr txBox="1"/>
+          <p:nvPr/>
+        </p:nvSpPr>
+        <p:spPr>
+          <a:xfrm>
+            <a:off x="603504" y="6263640"/>
+            <a:ext cx="9144000" cy="320040"/>
+          </a:xfrm>
+          <a:prstGeom prst="rect">
+            <a:avLst/>
+          </a:prstGeom>
+          <a:noFill/>
+        </p:spPr>
+        <p:txBody>
+          <a:bodyPr wrap="square">
+            <a:spAutoFit/>
+          </a:bodyPr>
+          <a:lstStyle/>
+          <a:p>
+            <a:pPr algn="l"/>
+            <a:r>
+              <a:rPr sz="1300" b="1" spc="120">
+                <a:solidFill>
+                  <a:srgbClr val="6B6B6B"/>
+                </a:solidFill>
+                <a:latin typeface="IBM Plex Mono"/>
+              </a:rPr>
+              <a:t>KILDE: STATENS REGNSKAB, 2026</a:t>
+            </a:r>
+          </a:p>
+        </p:txBody>
+      </p:sp>
+      <p:pic>
+        <p:nvPicPr>
+          <p:cNvPr id="7" name="Picture 6" descr="oes-logo-green.png"/>
+          <p:cNvPicPr>
+            <a:picLocks noChangeAspect="1"/>
+          </p:cNvPicPr>
+          <p:nvPr/>
+        </p:nvPicPr>
+        <p:blipFill>
+          <a:blip r:embed="rId2"/>
+          <a:stretch>
+            <a:fillRect/>
+          </a:stretch>
+        </p:blipFill>
+        <p:spPr>
+          <a:xfrm>
+            <a:off x="10518343" y="6215427"/>
+            <a:ext cx="1417320" cy="386541"/>
+          </a:xfrm>
+          <a:prstGeom prst="rect">
+            <a:avLst/>
+          </a:prstGeom>
+        </p:spPr>
+      </p:pic>
+    </p:spTree>
+  </p:cSld>
+  <p:clrMapOvr>
+    <a:masterClrMapping/>
+  </p:clrMapOvr>
+</p:sld>
+</file>
+
+<file path=ppt/slides/slide17.xml><?xml version="1.0" encoding="utf-8"?>
+<p:sld xmlns:a="http://schemas.openxmlformats.org/drawingml/2006/main" xmlns:p="http://schemas.openxmlformats.org/presentationml/2006/main" xmlns:r="http://schemas.openxmlformats.org/officeDocument/2006/relationships">
+  <p:cSld>
+    <p:spTree>
+      <p:nvGrpSpPr>
+        <p:cNvPr id="1" name=""/>
+        <p:cNvGrpSpPr/>
+        <p:nvPr/>
+      </p:nvGrpSpPr>
+      <p:grpSpPr/>
+      <p:sp>
+        <p:nvSpPr>
+          <p:cNvPr id="2" name="Rectangle 1"/>
+          <p:cNvSpPr/>
+          <p:nvPr/>
+        </p:nvSpPr>
+        <p:spPr>
+          <a:xfrm>
+            <a:off x="0" y="0"/>
+            <a:ext cx="12191695" cy="6858000"/>
+          </a:xfrm>
+          <a:prstGeom prst="rect">
+            <a:avLst/>
+          </a:prstGeom>
+          <a:solidFill>
+            <a:srgbClr val="F4F4F2"/>
+          </a:solidFill>
+          <a:ln>
+            <a:noFill/>
+          </a:ln>
+          <a:effectLst/>
+        </p:spPr>
+        <p:style>
+          <a:lnRef idx="1">
+            <a:schemeClr val="accent1"/>
+          </a:lnRef>
+          <a:fillRef idx="3">
+            <a:schemeClr val="accent1"/>
+          </a:fillRef>
+          <a:effectRef idx="2">
+            <a:schemeClr val="accent1"/>
+          </a:effectRef>
+          <a:fontRef idx="minor">
+            <a:schemeClr val="lt1"/>
+          </a:fontRef>
+        </p:style>
+        <p:txBody>
+          <a:bodyPr rtlCol="0" anchor="ctr"/>
+          <a:lstStyle/>
+          <a:p>
+            <a:pPr algn="ctr"/>
+          </a:p>
+        </p:txBody>
+      </p:sp>
+      <p:sp>
+        <p:nvSpPr>
+          <p:cNvPr id="3" name="Rectangle 2"/>
+          <p:cNvSpPr/>
+          <p:nvPr/>
+        </p:nvSpPr>
+        <p:spPr>
+          <a:xfrm>
+            <a:off x="0" y="0"/>
+            <a:ext cx="12191695" cy="6858000"/>
+          </a:xfrm>
+          <a:prstGeom prst="rect">
+            <a:avLst/>
+          </a:prstGeom>
+          <a:noFill/>
+          <a:ln w="38100">
+            <a:solidFill>
+              <a:srgbClr val="000000"/>
+            </a:solidFill>
+          </a:ln>
+          <a:effectLst/>
+        </p:spPr>
+        <p:style>
+          <a:lnRef idx="1">
+            <a:schemeClr val="accent1"/>
+          </a:lnRef>
+          <a:fillRef idx="3">
+            <a:schemeClr val="accent1"/>
+          </a:fillRef>
+          <a:effectRef idx="2">
+            <a:schemeClr val="accent1"/>
+          </a:effectRef>
+          <a:fontRef idx="minor">
+            <a:schemeClr val="lt1"/>
+          </a:fontRef>
+        </p:style>
+        <p:txBody>
+          <a:bodyPr rtlCol="0" anchor="ctr"/>
+          <a:lstStyle/>
+          <a:p>
+            <a:pPr algn="ctr"/>
+          </a:p>
+        </p:txBody>
+      </p:sp>
+      <p:sp>
+        <p:nvSpPr>
+          <p:cNvPr id="4" name="TextBox 3"/>
+          <p:cNvSpPr txBox="1"/>
+          <p:nvPr/>
+        </p:nvSpPr>
+        <p:spPr>
+          <a:xfrm>
+            <a:off x="603504" y="457200"/>
+            <a:ext cx="10984687" cy="731520"/>
+          </a:xfrm>
+          <a:prstGeom prst="rect">
+            <a:avLst/>
+          </a:prstGeom>
+          <a:noFill/>
+        </p:spPr>
+        <p:txBody>
+          <a:bodyPr wrap="square">
+            <a:spAutoFit/>
+          </a:bodyPr>
+          <a:lstStyle/>
+          <a:p>
+            <a:pPr algn="l">
+              <a:lnSpc>
+                <a:spcPct val="105000"/>
+              </a:lnSpc>
+            </a:pPr>
+            <a:r>
+              <a:rPr sz="4200" b="1">
+                <a:solidFill>
+                  <a:srgbClr val="000000"/>
+                </a:solidFill>
+                <a:latin typeface="IBM Plex Sans"/>
+              </a:rPr>
+              <a:t>Budget pr. område</a:t>
+            </a:r>
+          </a:p>
+        </p:txBody>
+      </p:sp>
+      <p:sp>
+        <p:nvSpPr>
+          <p:cNvPr id="5" name="Rectangle 4"/>
+          <p:cNvSpPr/>
+          <p:nvPr/>
+        </p:nvSpPr>
+        <p:spPr>
+          <a:xfrm>
+            <a:off x="694944" y="1044244"/>
+            <a:ext cx="640080" cy="76200"/>
+          </a:xfrm>
+          <a:prstGeom prst="rect">
+            <a:avLst/>
+          </a:prstGeom>
+          <a:solidFill>
+            <a:srgbClr val="066B43"/>
+          </a:solidFill>
+          <a:ln>
+            <a:noFill/>
+          </a:ln>
+          <a:effectLst/>
+        </p:spPr>
+        <p:style>
+          <a:lnRef idx="1">
+            <a:schemeClr val="accent1"/>
+          </a:lnRef>
+          <a:fillRef idx="3">
+            <a:schemeClr val="accent1"/>
+          </a:fillRef>
+          <a:effectRef idx="2">
+            <a:schemeClr val="accent1"/>
+          </a:effectRef>
+          <a:fontRef idx="minor">
+            <a:schemeClr val="lt1"/>
+          </a:fontRef>
+        </p:style>
+        <p:txBody>
+          <a:bodyPr rtlCol="0" anchor="ctr"/>
+          <a:lstStyle/>
+          <a:p>
+            <a:pPr algn="ctr"/>
+          </a:p>
+        </p:txBody>
+      </p:sp>
+      <p:sp>
+        <p:nvSpPr>
+          <p:cNvPr id="6" name="TextBox 5"/>
+          <p:cNvSpPr txBox="1"/>
+          <p:nvPr/>
+        </p:nvSpPr>
+        <p:spPr>
+          <a:xfrm>
+            <a:off x="603504" y="1627632"/>
+            <a:ext cx="2011680" cy="365760"/>
+          </a:xfrm>
+          <a:prstGeom prst="rect">
+            <a:avLst/>
+          </a:prstGeom>
+          <a:noFill/>
+        </p:spPr>
+        <p:txBody>
+          <a:bodyPr wrap="square">
+            <a:spAutoFit/>
+          </a:bodyPr>
+          <a:lstStyle/>
+          <a:p>
+            <a:pPr algn="l"/>
+            <a:r>
+              <a:rPr sz="1700" b="0">
+                <a:solidFill>
+                  <a:srgbClr val="000000"/>
+                </a:solidFill>
+                <a:latin typeface="IBM Plex Sans"/>
+              </a:rPr>
+              <a:t>Drift</a:t>
+            </a:r>
+          </a:p>
+        </p:txBody>
+      </p:sp>
+      <p:sp>
+        <p:nvSpPr>
+          <p:cNvPr id="7" name="Rectangle 6"/>
+          <p:cNvSpPr/>
+          <p:nvPr/>
+        </p:nvSpPr>
+        <p:spPr>
+          <a:xfrm>
+            <a:off x="2615184" y="1554480"/>
+            <a:ext cx="7784287" cy="502920"/>
+          </a:xfrm>
+          <a:prstGeom prst="rect">
+            <a:avLst/>
+          </a:prstGeom>
+          <a:solidFill>
+            <a:srgbClr val="FFFFFF"/>
+          </a:solidFill>
+          <a:ln w="25400">
+            <a:solidFill>
+              <a:srgbClr val="000000"/>
+            </a:solidFill>
+          </a:ln>
+          <a:effectLst/>
+        </p:spPr>
+        <p:style>
+          <a:lnRef idx="1">
+            <a:schemeClr val="accent1"/>
+          </a:lnRef>
+          <a:fillRef idx="3">
+            <a:schemeClr val="accent1"/>
+          </a:fillRef>
+          <a:effectRef idx="2">
+            <a:schemeClr val="accent1"/>
+          </a:effectRef>
+          <a:fontRef idx="minor">
+            <a:schemeClr val="lt1"/>
+          </a:fontRef>
+        </p:style>
+        <p:txBody>
+          <a:bodyPr rtlCol="0" anchor="ctr"/>
+          <a:lstStyle/>
+          <a:p>
+            <a:pPr algn="ctr"/>
+          </a:p>
+        </p:txBody>
+      </p:sp>
+      <p:sp>
+        <p:nvSpPr>
+          <p:cNvPr id="8" name="Rectangle 7"/>
+          <p:cNvSpPr/>
+          <p:nvPr/>
+        </p:nvSpPr>
+        <p:spPr>
+          <a:xfrm>
+            <a:off x="2615184" y="1554480"/>
+            <a:ext cx="7784287" cy="502920"/>
+          </a:xfrm>
+          <a:prstGeom prst="rect">
+            <a:avLst/>
+          </a:prstGeom>
+          <a:solidFill>
+            <a:srgbClr val="000000"/>
+          </a:solidFill>
+          <a:ln>
+            <a:noFill/>
+          </a:ln>
+          <a:effectLst/>
+        </p:spPr>
+        <p:style>
+          <a:lnRef idx="1">
+            <a:schemeClr val="accent1"/>
+          </a:lnRef>
+          <a:fillRef idx="3">
+            <a:schemeClr val="accent1"/>
+          </a:fillRef>
+          <a:effectRef idx="2">
+            <a:schemeClr val="accent1"/>
+          </a:effectRef>
+          <a:fontRef idx="minor">
+            <a:schemeClr val="lt1"/>
+          </a:fontRef>
+        </p:style>
+        <p:txBody>
+          <a:bodyPr rtlCol="0" anchor="ctr"/>
+          <a:lstStyle/>
+          <a:p>
+            <a:pPr algn="ctr"/>
+          </a:p>
+        </p:txBody>
+      </p:sp>
+      <p:sp>
+        <p:nvSpPr>
+          <p:cNvPr id="9" name="TextBox 8"/>
+          <p:cNvSpPr txBox="1"/>
+          <p:nvPr/>
+        </p:nvSpPr>
+        <p:spPr>
+          <a:xfrm>
+            <a:off x="10536631" y="1627632"/>
+            <a:ext cx="1005840" cy="365760"/>
+          </a:xfrm>
+          <a:prstGeom prst="rect">
+            <a:avLst/>
+          </a:prstGeom>
+          <a:noFill/>
+        </p:spPr>
+        <p:txBody>
+          <a:bodyPr wrap="square">
+            <a:spAutoFit/>
+          </a:bodyPr>
+          <a:lstStyle/>
+          <a:p>
+            <a:pPr algn="r"/>
+            <a:r>
+              <a:rPr sz="1700" b="1">
+                <a:solidFill>
+                  <a:srgbClr val="000000"/>
+                </a:solidFill>
+                <a:latin typeface="IBM Plex Mono"/>
+              </a:rPr>
+              <a:t>240</a:t>
+            </a:r>
+          </a:p>
+        </p:txBody>
+      </p:sp>
+      <p:sp>
+        <p:nvSpPr>
+          <p:cNvPr id="10" name="TextBox 9"/>
+          <p:cNvSpPr txBox="1"/>
+          <p:nvPr/>
+        </p:nvSpPr>
+        <p:spPr>
+          <a:xfrm>
+            <a:off x="603504" y="2450592"/>
+            <a:ext cx="2011680" cy="365760"/>
+          </a:xfrm>
+          <a:prstGeom prst="rect">
+            <a:avLst/>
+          </a:prstGeom>
+          <a:noFill/>
+        </p:spPr>
+        <p:txBody>
+          <a:bodyPr wrap="square">
+            <a:spAutoFit/>
+          </a:bodyPr>
+          <a:lstStyle/>
+          <a:p>
+            <a:pPr algn="l"/>
+            <a:r>
+              <a:rPr sz="1700" b="0">
+                <a:solidFill>
+                  <a:srgbClr val="000000"/>
+                </a:solidFill>
+                <a:latin typeface="IBM Plex Sans"/>
+              </a:rPr>
+              <a:t>Udvikling</a:t>
+            </a:r>
+          </a:p>
+        </p:txBody>
+      </p:sp>
+      <p:sp>
+        <p:nvSpPr>
+          <p:cNvPr id="11" name="Rectangle 10"/>
+          <p:cNvSpPr/>
+          <p:nvPr/>
+        </p:nvSpPr>
+        <p:spPr>
+          <a:xfrm>
+            <a:off x="2615184" y="2377440"/>
+            <a:ext cx="7784287" cy="502920"/>
+          </a:xfrm>
+          <a:prstGeom prst="rect">
+            <a:avLst/>
+          </a:prstGeom>
+          <a:solidFill>
+            <a:srgbClr val="FFFFFF"/>
+          </a:solidFill>
+          <a:ln w="25400">
+            <a:solidFill>
+              <a:srgbClr val="000000"/>
+            </a:solidFill>
+          </a:ln>
+          <a:effectLst/>
+        </p:spPr>
+        <p:style>
+          <a:lnRef idx="1">
+            <a:schemeClr val="accent1"/>
+          </a:lnRef>
+          <a:fillRef idx="3">
+            <a:schemeClr val="accent1"/>
+          </a:fillRef>
+          <a:effectRef idx="2">
+            <a:schemeClr val="accent1"/>
+          </a:effectRef>
+          <a:fontRef idx="minor">
+            <a:schemeClr val="lt1"/>
+          </a:fontRef>
+        </p:style>
+        <p:txBody>
+          <a:bodyPr rtlCol="0" anchor="ctr"/>
+          <a:lstStyle/>
+          <a:p>
+            <a:pPr algn="ctr"/>
+          </a:p>
+        </p:txBody>
+      </p:sp>
+      <p:sp>
+        <p:nvSpPr>
+          <p:cNvPr id="12" name="Rectangle 11"/>
+          <p:cNvSpPr/>
+          <p:nvPr/>
+        </p:nvSpPr>
+        <p:spPr>
+          <a:xfrm>
+            <a:off x="2615184" y="2377440"/>
+            <a:ext cx="3814300" cy="502920"/>
+          </a:xfrm>
+          <a:prstGeom prst="rect">
+            <a:avLst/>
+          </a:prstGeom>
+          <a:solidFill>
+            <a:srgbClr val="ED5E66"/>
+          </a:solidFill>
+          <a:ln>
+            <a:noFill/>
+          </a:ln>
+          <a:effectLst/>
+        </p:spPr>
+        <p:style>
+          <a:lnRef idx="1">
+            <a:schemeClr val="accent1"/>
+          </a:lnRef>
+          <a:fillRef idx="3">
+            <a:schemeClr val="accent1"/>
+          </a:fillRef>
+          <a:effectRef idx="2">
+            <a:schemeClr val="accent1"/>
+          </a:effectRef>
+          <a:fontRef idx="minor">
+            <a:schemeClr val="lt1"/>
+          </a:fontRef>
+        </p:style>
+        <p:txBody>
+          <a:bodyPr rtlCol="0" anchor="ctr"/>
+          <a:lstStyle/>
+          <a:p>
+            <a:pPr algn="ctr"/>
+          </a:p>
+        </p:txBody>
+      </p:sp>
+      <p:sp>
+        <p:nvSpPr>
+          <p:cNvPr id="13" name="TextBox 12"/>
+          <p:cNvSpPr txBox="1"/>
+          <p:nvPr/>
+        </p:nvSpPr>
+        <p:spPr>
+          <a:xfrm>
+            <a:off x="10536631" y="2450592"/>
+            <a:ext cx="1005840" cy="365760"/>
+          </a:xfrm>
+          <a:prstGeom prst="rect">
+            <a:avLst/>
+          </a:prstGeom>
+          <a:noFill/>
+        </p:spPr>
+        <p:txBody>
+          <a:bodyPr wrap="square">
+            <a:spAutoFit/>
+          </a:bodyPr>
+          <a:lstStyle/>
+          <a:p>
+            <a:pPr algn="r"/>
+            <a:r>
+              <a:rPr sz="1700" b="1">
+                <a:solidFill>
+                  <a:srgbClr val="000000"/>
+                </a:solidFill>
+                <a:latin typeface="IBM Plex Mono"/>
+              </a:rPr>
+              <a:t>118</a:t>
+            </a:r>
+          </a:p>
+        </p:txBody>
+      </p:sp>
+      <p:sp>
+        <p:nvSpPr>
+          <p:cNvPr id="14" name="TextBox 13"/>
+          <p:cNvSpPr txBox="1"/>
+          <p:nvPr/>
+        </p:nvSpPr>
+        <p:spPr>
+          <a:xfrm>
+            <a:off x="603504" y="3273552"/>
+            <a:ext cx="2011680" cy="365760"/>
+          </a:xfrm>
+          <a:prstGeom prst="rect">
+            <a:avLst/>
+          </a:prstGeom>
+          <a:noFill/>
+        </p:spPr>
+        <p:txBody>
+          <a:bodyPr wrap="square">
+            <a:spAutoFit/>
+          </a:bodyPr>
+          <a:lstStyle/>
+          <a:p>
+            <a:pPr algn="l"/>
+            <a:r>
+              <a:rPr sz="1700" b="0">
+                <a:solidFill>
+                  <a:srgbClr val="000000"/>
+                </a:solidFill>
+                <a:latin typeface="IBM Plex Sans"/>
+              </a:rPr>
+              <a:t>Support</a:t>
+            </a:r>
+          </a:p>
+        </p:txBody>
+      </p:sp>
+      <p:sp>
+        <p:nvSpPr>
+          <p:cNvPr id="15" name="Rectangle 14"/>
+          <p:cNvSpPr/>
+          <p:nvPr/>
+        </p:nvSpPr>
+        <p:spPr>
+          <a:xfrm>
+            <a:off x="2615184" y="3200400"/>
+            <a:ext cx="7784287" cy="502920"/>
+          </a:xfrm>
+          <a:prstGeom prst="rect">
+            <a:avLst/>
+          </a:prstGeom>
+          <a:solidFill>
+            <a:srgbClr val="FFFFFF"/>
+          </a:solidFill>
+          <a:ln w="25400">
+            <a:solidFill>
+              <a:srgbClr val="000000"/>
+            </a:solidFill>
+          </a:ln>
+          <a:effectLst/>
+        </p:spPr>
+        <p:style>
+          <a:lnRef idx="1">
+            <a:schemeClr val="accent1"/>
+          </a:lnRef>
+          <a:fillRef idx="3">
+            <a:schemeClr val="accent1"/>
+          </a:fillRef>
+          <a:effectRef idx="2">
+            <a:schemeClr val="accent1"/>
+          </a:effectRef>
+          <a:fontRef idx="minor">
+            <a:schemeClr val="lt1"/>
+          </a:fontRef>
+        </p:style>
+        <p:txBody>
+          <a:bodyPr rtlCol="0" anchor="ctr"/>
+          <a:lstStyle/>
+          <a:p>
+            <a:pPr algn="ctr"/>
+          </a:p>
+        </p:txBody>
+      </p:sp>
+      <p:sp>
+        <p:nvSpPr>
+          <p:cNvPr id="16" name="Rectangle 15"/>
+          <p:cNvSpPr/>
+          <p:nvPr/>
+        </p:nvSpPr>
+        <p:spPr>
+          <a:xfrm>
+            <a:off x="2615184" y="3200400"/>
+            <a:ext cx="2101757" cy="502920"/>
+          </a:xfrm>
+          <a:prstGeom prst="rect">
+            <a:avLst/>
+          </a:prstGeom>
+          <a:solidFill>
+            <a:srgbClr val="000000"/>
+          </a:solidFill>
+          <a:ln>
+            <a:noFill/>
+          </a:ln>
+          <a:effectLst/>
+        </p:spPr>
+        <p:style>
+          <a:lnRef idx="1">
+            <a:schemeClr val="accent1"/>
+          </a:lnRef>
+          <a:fillRef idx="3">
+            <a:schemeClr val="accent1"/>
+          </a:fillRef>
+          <a:effectRef idx="2">
+            <a:schemeClr val="accent1"/>
+          </a:effectRef>
+          <a:fontRef idx="minor">
+            <a:schemeClr val="lt1"/>
+          </a:fontRef>
+        </p:style>
+        <p:txBody>
+          <a:bodyPr rtlCol="0" anchor="ctr"/>
+          <a:lstStyle/>
+          <a:p>
+            <a:pPr algn="ctr"/>
+          </a:p>
+        </p:txBody>
+      </p:sp>
+      <p:sp>
+        <p:nvSpPr>
+          <p:cNvPr id="17" name="TextBox 16"/>
+          <p:cNvSpPr txBox="1"/>
+          <p:nvPr/>
+        </p:nvSpPr>
+        <p:spPr>
+          <a:xfrm>
+            <a:off x="10536631" y="3273552"/>
+            <a:ext cx="1005840" cy="365760"/>
+          </a:xfrm>
+          <a:prstGeom prst="rect">
+            <a:avLst/>
+          </a:prstGeom>
+          <a:noFill/>
+        </p:spPr>
+        <p:txBody>
+          <a:bodyPr wrap="square">
+            <a:spAutoFit/>
+          </a:bodyPr>
+          <a:lstStyle/>
+          <a:p>
+            <a:pPr algn="r"/>
+            <a:r>
+              <a:rPr sz="1700" b="1">
+                <a:solidFill>
+                  <a:srgbClr val="000000"/>
+                </a:solidFill>
+                <a:latin typeface="IBM Plex Mono"/>
+              </a:rPr>
+              <a:t>64</a:t>
+            </a:r>
+          </a:p>
+        </p:txBody>
+      </p:sp>
+      <p:sp>
+        <p:nvSpPr>
+          <p:cNvPr id="18" name="TextBox 17"/>
+          <p:cNvSpPr txBox="1"/>
+          <p:nvPr/>
+        </p:nvSpPr>
+        <p:spPr>
+          <a:xfrm>
+            <a:off x="603504" y="6263640"/>
+            <a:ext cx="9144000" cy="320040"/>
+          </a:xfrm>
+          <a:prstGeom prst="rect">
+            <a:avLst/>
+          </a:prstGeom>
+          <a:noFill/>
+        </p:spPr>
+        <p:txBody>
+          <a:bodyPr wrap="square">
+            <a:spAutoFit/>
+          </a:bodyPr>
+          <a:lstStyle/>
+          <a:p>
+            <a:pPr algn="l"/>
+            <a:r>
+              <a:rPr sz="1300" b="1" spc="120">
+                <a:solidFill>
+                  <a:srgbClr val="6B6B6B"/>
+                </a:solidFill>
+                <a:latin typeface="IBM Plex Mono"/>
+              </a:rPr>
+              <a:t>KILDE: STATENS REGNSKAB, 2026</a:t>
+            </a:r>
+          </a:p>
+        </p:txBody>
+      </p:sp>
+      <p:pic>
+        <p:nvPicPr>
+          <p:cNvPr id="19" name="Picture 18" descr="oes-logo-green.png"/>
+          <p:cNvPicPr>
+            <a:picLocks noChangeAspect="1"/>
+          </p:cNvPicPr>
+          <p:nvPr/>
+        </p:nvPicPr>
+        <p:blipFill>
+          <a:blip r:embed="rId2"/>
+          <a:stretch>
+            <a:fillRect/>
+          </a:stretch>
+        </p:blipFill>
+        <p:spPr>
+          <a:xfrm>
+            <a:off x="10518343" y="6215427"/>
+            <a:ext cx="1417320" cy="386541"/>
+          </a:xfrm>
+          <a:prstGeom prst="rect">
+            <a:avLst/>
+          </a:prstGeom>
+        </p:spPr>
+      </p:pic>
+    </p:spTree>
+  </p:cSld>
+  <p:clrMapOvr>
+    <a:masterClrMapping/>
+  </p:clrMapOvr>
+</p:sld>
+</file>
+
+<file path=ppt/slides/slide18.xml><?xml version="1.0" encoding="utf-8"?>
+<p:sld xmlns:a="http://schemas.openxmlformats.org/drawingml/2006/main" xmlns:p="http://schemas.openxmlformats.org/presentationml/2006/main" xmlns:r="http://schemas.openxmlformats.org/officeDocument/2006/relationships">
+  <p:cSld>
+    <p:spTree>
+      <p:nvGrpSpPr>
+        <p:cNvPr id="1" name=""/>
+        <p:cNvGrpSpPr/>
+        <p:nvPr/>
+      </p:nvGrpSpPr>
+      <p:grpSpPr/>
+      <p:sp>
+        <p:nvSpPr>
+          <p:cNvPr id="2" name="Rectangle 1"/>
+          <p:cNvSpPr/>
+          <p:nvPr/>
+        </p:nvSpPr>
+        <p:spPr>
+          <a:xfrm>
+            <a:off x="0" y="0"/>
+            <a:ext cx="12191695" cy="6858000"/>
+          </a:xfrm>
+          <a:prstGeom prst="rect">
+            <a:avLst/>
+          </a:prstGeom>
+          <a:solidFill>
+            <a:srgbClr val="F4F4F2"/>
+          </a:solidFill>
+          <a:ln>
+            <a:noFill/>
+          </a:ln>
+          <a:effectLst/>
+        </p:spPr>
+        <p:style>
+          <a:lnRef idx="1">
+            <a:schemeClr val="accent1"/>
+          </a:lnRef>
+          <a:fillRef idx="3">
+            <a:schemeClr val="accent1"/>
+          </a:fillRef>
+          <a:effectRef idx="2">
+            <a:schemeClr val="accent1"/>
+          </a:effectRef>
+          <a:fontRef idx="minor">
+            <a:schemeClr val="lt1"/>
+          </a:fontRef>
+        </p:style>
+        <p:txBody>
+          <a:bodyPr rtlCol="0" anchor="ctr"/>
+          <a:lstStyle/>
+          <a:p>
+            <a:pPr algn="ctr"/>
+          </a:p>
+        </p:txBody>
+      </p:sp>
+      <p:sp>
+        <p:nvSpPr>
+          <p:cNvPr id="3" name="Rectangle 2"/>
+          <p:cNvSpPr/>
+          <p:nvPr/>
+        </p:nvSpPr>
+        <p:spPr>
+          <a:xfrm>
+            <a:off x="0" y="0"/>
+            <a:ext cx="12191695" cy="6858000"/>
+          </a:xfrm>
+          <a:prstGeom prst="rect">
+            <a:avLst/>
+          </a:prstGeom>
+          <a:noFill/>
+          <a:ln w="38100">
+            <a:solidFill>
+              <a:srgbClr val="000000"/>
+            </a:solidFill>
+          </a:ln>
+          <a:effectLst/>
+        </p:spPr>
+        <p:style>
+          <a:lnRef idx="1">
+            <a:schemeClr val="accent1"/>
+          </a:lnRef>
+          <a:fillRef idx="3">
+            <a:schemeClr val="accent1"/>
+          </a:fillRef>
+          <a:effectRef idx="2">
+            <a:schemeClr val="accent1"/>
+          </a:effectRef>
+          <a:fontRef idx="minor">
+            <a:schemeClr val="lt1"/>
+          </a:fontRef>
+        </p:style>
+        <p:txBody>
+          <a:bodyPr rtlCol="0" anchor="ctr"/>
+          <a:lstStyle/>
+          <a:p>
+            <a:pPr algn="ctr"/>
+          </a:p>
+        </p:txBody>
+      </p:sp>
+      <p:sp>
+        <p:nvSpPr>
+          <p:cNvPr id="4" name="Rectangle 3"/>
+          <p:cNvSpPr/>
+          <p:nvPr/>
+        </p:nvSpPr>
+        <p:spPr>
+          <a:xfrm>
+            <a:off x="603504" y="1828800"/>
+            <a:ext cx="2377440" cy="2377440"/>
+          </a:xfrm>
+          <a:prstGeom prst="rect">
+            <a:avLst/>
+          </a:prstGeom>
+          <a:solidFill>
+            <a:srgbClr val="E8E8E3"/>
+          </a:solidFill>
+          <a:ln w="25400">
+            <a:solidFill>
+              <a:srgbClr val="000000"/>
+            </a:solidFill>
+          </a:ln>
+          <a:effectLst/>
+        </p:spPr>
+        <p:style>
+          <a:lnRef idx="1">
+            <a:schemeClr val="accent1"/>
+          </a:lnRef>
+          <a:fillRef idx="3">
+            <a:schemeClr val="accent1"/>
+          </a:fillRef>
+          <a:effectRef idx="2">
+            <a:schemeClr val="accent1"/>
+          </a:effectRef>
+          <a:fontRef idx="minor">
+            <a:schemeClr val="lt1"/>
+          </a:fontRef>
+        </p:style>
+        <p:txBody>
+          <a:bodyPr rtlCol="0" anchor="ctr" wrap="square"/>
+          <a:lstStyle/>
+          <a:p>
+            <a:pPr algn="ctr"/>
+            <a:r>
+              <a:rPr sz="1200" b="1" spc="120">
+                <a:solidFill>
+                  <a:srgbClr val="6B6B6B"/>
+                </a:solidFill>
+                <a:latin typeface="IBM Plex Mono"/>
+              </a:rPr>
+              <a:t>PORTRÆT</a:t>
+            </a:r>
+          </a:p>
+        </p:txBody>
+      </p:sp>
+      <p:sp>
+        <p:nvSpPr>
+          <p:cNvPr id="5" name="Rectangle 4"/>
+          <p:cNvSpPr/>
+          <p:nvPr/>
+        </p:nvSpPr>
+        <p:spPr>
+          <a:xfrm>
+            <a:off x="3657600" y="1828800"/>
+            <a:ext cx="76200" cy="1828800"/>
+          </a:xfrm>
+          <a:prstGeom prst="rect">
+            <a:avLst/>
+          </a:prstGeom>
+          <a:solidFill>
+            <a:srgbClr val="ED5E66"/>
+          </a:solidFill>
+          <a:ln>
+            <a:noFill/>
+          </a:ln>
+          <a:effectLst/>
+        </p:spPr>
+        <p:style>
+          <a:lnRef idx="1">
+            <a:schemeClr val="accent1"/>
+          </a:lnRef>
+          <a:fillRef idx="3">
+            <a:schemeClr val="accent1"/>
+          </a:fillRef>
+          <a:effectRef idx="2">
+            <a:schemeClr val="accent1"/>
+          </a:effectRef>
+          <a:fontRef idx="minor">
+            <a:schemeClr val="lt1"/>
+          </a:fontRef>
+        </p:style>
+        <p:txBody>
+          <a:bodyPr rtlCol="0" anchor="ctr"/>
+          <a:lstStyle/>
+          <a:p>
+            <a:pPr algn="ctr"/>
+          </a:p>
+        </p:txBody>
+      </p:sp>
+      <p:sp>
+        <p:nvSpPr>
+          <p:cNvPr id="6" name="TextBox 5"/>
+          <p:cNvSpPr txBox="1"/>
+          <p:nvPr/>
+        </p:nvSpPr>
+        <p:spPr>
+          <a:xfrm>
+            <a:off x="3931920" y="1828800"/>
+            <a:ext cx="7315200" cy="2011680"/>
+          </a:xfrm>
+          <a:prstGeom prst="rect">
+            <a:avLst/>
+          </a:prstGeom>
+          <a:noFill/>
+        </p:spPr>
+        <p:txBody>
+          <a:bodyPr wrap="square">
+            <a:spAutoFit/>
+          </a:bodyPr>
+          <a:lstStyle/>
+          <a:p>
+            <a:pPr algn="l">
+              <a:lnSpc>
+                <a:spcPct val="120000"/>
+              </a:lnSpc>
+            </a:pPr>
+            <a:r>
+              <a:rPr sz="3000" b="1">
+                <a:solidFill>
+                  <a:srgbClr val="000000"/>
+                </a:solidFill>
+                <a:latin typeface="IBM Plex Sans"/>
+              </a:rPr>
+              <a:t>“Gode beslutninger bygger på pålidelige tal.”</a:t>
+            </a:r>
+          </a:p>
+        </p:txBody>
+      </p:sp>
+      <p:sp>
+        <p:nvSpPr>
+          <p:cNvPr id="7" name="TextBox 6"/>
+          <p:cNvSpPr txBox="1"/>
+          <p:nvPr/>
+        </p:nvSpPr>
+        <p:spPr>
+          <a:xfrm>
+            <a:off x="3931920" y="3931920"/>
+            <a:ext cx="7315200" cy="457200"/>
+          </a:xfrm>
+          <a:prstGeom prst="rect">
+            <a:avLst/>
+          </a:prstGeom>
+          <a:noFill/>
+        </p:spPr>
+        <p:txBody>
+          <a:bodyPr wrap="square">
+            <a:spAutoFit/>
+          </a:bodyPr>
+          <a:lstStyle/>
+          <a:p>
+            <a:pPr algn="l"/>
+            <a:r>
+              <a:rPr sz="1800" b="1">
+                <a:solidFill>
+                  <a:srgbClr val="000000"/>
+                </a:solidFill>
+                <a:latin typeface="IBM Plex Sans"/>
+              </a:rPr>
+              <a:t>Økonomistyrelsen</a:t>
+            </a:r>
+          </a:p>
+        </p:txBody>
+      </p:sp>
+      <p:sp>
+        <p:nvSpPr>
+          <p:cNvPr id="8" name="TextBox 7"/>
+          <p:cNvSpPr txBox="1"/>
+          <p:nvPr/>
+        </p:nvSpPr>
+        <p:spPr>
+          <a:xfrm>
+            <a:off x="3931920" y="4389120"/>
+            <a:ext cx="7315200" cy="365760"/>
+          </a:xfrm>
+          <a:prstGeom prst="rect">
+            <a:avLst/>
+          </a:prstGeom>
+          <a:noFill/>
+        </p:spPr>
+        <p:txBody>
+          <a:bodyPr wrap="square">
+            <a:spAutoFit/>
+          </a:bodyPr>
+          <a:lstStyle/>
+          <a:p>
+            <a:pPr algn="l"/>
+            <a:r>
+              <a:rPr sz="1300" b="1" spc="120">
+                <a:solidFill>
+                  <a:srgbClr val="6B6B6B"/>
+                </a:solidFill>
+                <a:latin typeface="IBM Plex Mono"/>
+              </a:rPr>
+              <a:t>STATENS ØKONOMIFORVALTNING</a:t>
+            </a:r>
+          </a:p>
+        </p:txBody>
+      </p:sp>
+      <p:pic>
+        <p:nvPicPr>
+          <p:cNvPr id="9" name="Picture 8" descr="oes-logo-green.png"/>
+          <p:cNvPicPr>
+            <a:picLocks noChangeAspect="1"/>
+          </p:cNvPicPr>
+          <p:nvPr/>
+        </p:nvPicPr>
+        <p:blipFill>
+          <a:blip r:embed="rId2"/>
+          <a:stretch>
+            <a:fillRect/>
+          </a:stretch>
+        </p:blipFill>
+        <p:spPr>
+          <a:xfrm>
+            <a:off x="10518343" y="6215427"/>
+            <a:ext cx="1417320" cy="386541"/>
+          </a:xfrm>
+          <a:prstGeom prst="rect">
+            <a:avLst/>
+          </a:prstGeom>
+        </p:spPr>
+      </p:pic>
+    </p:spTree>
+  </p:cSld>
+  <p:clrMapOvr>
+    <a:masterClrMapping/>
+  </p:clrMapOvr>
+</p:sld>
+</file>
+
+<file path=ppt/slides/slide19.xml><?xml version="1.0" encoding="utf-8"?>
 <p:sld xmlns:a="http://schemas.openxmlformats.org/drawingml/2006/main" xmlns:p="http://schemas.openxmlformats.org/presentationml/2006/main" xmlns:r="http://schemas.openxmlformats.org/officeDocument/2006/relationships">
   <p:cSld>
     <p:spTree>

--- a/example.pptx
+++ b/example.pptx
@@ -3748,7 +3748,7 @@
         </p:nvSpPr>
         <p:spPr>
           <a:xfrm>
-            <a:off x="694944" y="1044244"/>
+            <a:off x="694944" y="1173600"/>
             <a:ext cx="640080" cy="76200"/>
           </a:xfrm>
           <a:prstGeom prst="rect">
@@ -4265,7 +4265,7 @@
         </p:nvSpPr>
         <p:spPr>
           <a:xfrm>
-            <a:off x="694944" y="1044244"/>
+            <a:off x="694944" y="1173600"/>
             <a:ext cx="640080" cy="76200"/>
           </a:xfrm>
           <a:prstGeom prst="rect">
@@ -4808,7 +4808,7 @@
         </p:nvSpPr>
         <p:spPr>
           <a:xfrm>
-            <a:off x="694944" y="1044244"/>
+            <a:off x="694944" y="1173600"/>
             <a:ext cx="640080" cy="76200"/>
           </a:xfrm>
           <a:prstGeom prst="rect">
@@ -5525,7 +5525,7 @@
         </p:nvSpPr>
         <p:spPr>
           <a:xfrm>
-            <a:off x="694944" y="1044244"/>
+            <a:off x="694944" y="1173600"/>
             <a:ext cx="640080" cy="76200"/>
           </a:xfrm>
           <a:prstGeom prst="rect">
@@ -6490,7 +6490,7 @@
         </p:nvSpPr>
         <p:spPr>
           <a:xfrm>
-            <a:off x="694944" y="1044244"/>
+            <a:off x="694944" y="1173600"/>
             <a:ext cx="640080" cy="76200"/>
           </a:xfrm>
           <a:prstGeom prst="rect">
@@ -7586,7 +7586,7 @@
         </p:nvSpPr>
         <p:spPr>
           <a:xfrm>
-            <a:off x="694944" y="1044244"/>
+            <a:off x="694944" y="1173600"/>
             <a:ext cx="640080" cy="76200"/>
           </a:xfrm>
           <a:prstGeom prst="rect">
@@ -9082,7 +9082,7 @@
         </p:nvSpPr>
         <p:spPr>
           <a:xfrm>
-            <a:off x="694944" y="1044244"/>
+            <a:off x="694944" y="1173600"/>
             <a:ext cx="640080" cy="76200"/>
           </a:xfrm>
           <a:prstGeom prst="rect">
@@ -9627,7 +9627,7 @@
         </p:nvSpPr>
         <p:spPr>
           <a:xfrm>
-            <a:off x="694944" y="1044244"/>
+            <a:off x="694944" y="1173600"/>
             <a:ext cx="640080" cy="76200"/>
           </a:xfrm>
           <a:prstGeom prst="rect">
@@ -10280,7 +10280,7 @@
         </p:nvSpPr>
         <p:spPr>
           <a:xfrm>
-            <a:off x="694944" y="1044244"/>
+            <a:off x="694944" y="1173600"/>
             <a:ext cx="640080" cy="76200"/>
           </a:xfrm>
           <a:prstGeom prst="rect">
@@ -10900,7 +10900,7 @@
         </p:nvSpPr>
         <p:spPr>
           <a:xfrm>
-            <a:off x="694944" y="1044244"/>
+            <a:off x="694944" y="1173600"/>
             <a:ext cx="640080" cy="76200"/>
           </a:xfrm>
           <a:prstGeom prst="rect">
@@ -11552,7 +11552,7 @@
         </p:nvSpPr>
         <p:spPr>
           <a:xfrm>
-            <a:off x="694944" y="1044244"/>
+            <a:off x="694944" y="1173600"/>
             <a:ext cx="640080" cy="76200"/>
           </a:xfrm>
           <a:prstGeom prst="rect">
